--- a/chapter9/chapter9.pptx
+++ b/chapter9/chapter9.pptx
@@ -10077,10 +10077,12 @@
           </a:bodyPr>
           <a:lstStyle/>
           <a:p>
-            <a:pPr>
-              <a:spcAft>
-                <a:spcPts val="1000"/>
-              </a:spcAft>
+            <a:pPr lvl="0" marL="457200" indent="-228600">
+              <a:buFont typeface="Calibri"/>
+              <a:spcAft>
+                <a:spcPts val="1000"/>
+              </a:spcAft>
+              <a:buSzPct val="100000"/>
               <a:buChar char="•"/>
               <a:lnSpc>
                 <a:spcPts val="2200"/>
@@ -10097,10 +10099,12 @@
             </a:r>
           </a:p>
           <a:p>
-            <a:pPr>
-              <a:spcAft>
-                <a:spcPts val="1000"/>
-              </a:spcAft>
+            <a:pPr lvl="0" marL="457200" indent="-228600">
+              <a:buFont typeface="Calibri"/>
+              <a:spcAft>
+                <a:spcPts val="1000"/>
+              </a:spcAft>
+              <a:buSzPct val="100000"/>
               <a:buChar char="•"/>
               <a:lnSpc>
                 <a:spcPts val="2200"/>
@@ -10236,10 +10240,12 @@
           </a:bodyPr>
           <a:lstStyle/>
           <a:p>
-            <a:pPr>
-              <a:spcAft>
-                <a:spcPts val="1000"/>
-              </a:spcAft>
+            <a:pPr lvl="0" marL="457200" indent="-228600">
+              <a:buFont typeface="Calibri"/>
+              <a:spcAft>
+                <a:spcPts val="1000"/>
+              </a:spcAft>
+              <a:buSzPct val="100000"/>
               <a:buChar char="•"/>
               <a:lnSpc>
                 <a:spcPts val="2200"/>
@@ -10375,10 +10381,12 @@
           </a:bodyPr>
           <a:lstStyle/>
           <a:p>
-            <a:pPr>
-              <a:spcAft>
-                <a:spcPts val="1000"/>
-              </a:spcAft>
+            <a:pPr lvl="0" marL="457200" indent="-228600">
+              <a:buFont typeface="Calibri"/>
+              <a:spcAft>
+                <a:spcPts val="1000"/>
+              </a:spcAft>
+              <a:buSzPct val="100000"/>
               <a:buChar char="•"/>
               <a:lnSpc>
                 <a:spcPts val="2200"/>
@@ -10395,10 +10403,12 @@
             </a:r>
           </a:p>
           <a:p>
-            <a:pPr>
-              <a:spcAft>
-                <a:spcPts val="1000"/>
-              </a:spcAft>
+            <a:pPr lvl="0" marL="457200" indent="-228600">
+              <a:buFont typeface="Calibri"/>
+              <a:spcAft>
+                <a:spcPts val="1000"/>
+              </a:spcAft>
+              <a:buSzPct val="100000"/>
               <a:buChar char="•"/>
               <a:lnSpc>
                 <a:spcPts val="2200"/>
@@ -10415,10 +10425,12 @@
             </a:r>
           </a:p>
           <a:p>
-            <a:pPr>
-              <a:spcAft>
-                <a:spcPts val="1000"/>
-              </a:spcAft>
+            <a:pPr lvl="0" marL="457200" indent="-228600">
+              <a:buFont typeface="Calibri"/>
+              <a:spcAft>
+                <a:spcPts val="1000"/>
+              </a:spcAft>
+              <a:buSzPct val="100000"/>
               <a:buChar char="•"/>
               <a:lnSpc>
                 <a:spcPts val="2200"/>
@@ -10554,10 +10566,12 @@
           </a:bodyPr>
           <a:lstStyle/>
           <a:p>
-            <a:pPr>
-              <a:spcAft>
-                <a:spcPts val="1000"/>
-              </a:spcAft>
+            <a:pPr lvl="0" marL="457200" indent="-228600">
+              <a:buFont typeface="Calibri"/>
+              <a:spcAft>
+                <a:spcPts val="1000"/>
+              </a:spcAft>
+              <a:buSzPct val="100000"/>
               <a:buChar char="•"/>
               <a:lnSpc>
                 <a:spcPts val="2200"/>
@@ -10574,10 +10588,12 @@
             </a:r>
           </a:p>
           <a:p>
-            <a:pPr>
-              <a:spcAft>
-                <a:spcPts val="1000"/>
-              </a:spcAft>
+            <a:pPr lvl="0" marL="457200" indent="-228600">
+              <a:buFont typeface="Calibri"/>
+              <a:spcAft>
+                <a:spcPts val="1000"/>
+              </a:spcAft>
+              <a:buSzPct val="100000"/>
               <a:buChar char="•"/>
               <a:lnSpc>
                 <a:spcPts val="2200"/>
@@ -10713,10 +10729,12 @@
           </a:bodyPr>
           <a:lstStyle/>
           <a:p>
-            <a:pPr>
-              <a:spcAft>
-                <a:spcPts val="1000"/>
-              </a:spcAft>
+            <a:pPr lvl="0" marL="457200" indent="-228600">
+              <a:buFont typeface="Calibri"/>
+              <a:spcAft>
+                <a:spcPts val="1000"/>
+              </a:spcAft>
+              <a:buSzPct val="100000"/>
               <a:buChar char="•"/>
               <a:lnSpc>
                 <a:spcPts val="2200"/>
@@ -10733,10 +10751,12 @@
             </a:r>
           </a:p>
           <a:p>
-            <a:pPr>
-              <a:spcAft>
-                <a:spcPts val="1000"/>
-              </a:spcAft>
+            <a:pPr lvl="0" marL="457200" indent="-228600">
+              <a:buFont typeface="Calibri"/>
+              <a:spcAft>
+                <a:spcPts val="1000"/>
+              </a:spcAft>
+              <a:buSzPct val="100000"/>
               <a:buChar char="•"/>
               <a:lnSpc>
                 <a:spcPts val="2200"/>
@@ -10753,10 +10773,12 @@
             </a:r>
           </a:p>
           <a:p>
-            <a:pPr>
-              <a:spcAft>
-                <a:spcPts val="1000"/>
-              </a:spcAft>
+            <a:pPr lvl="0" marL="457200" indent="-228600">
+              <a:buFont typeface="Calibri"/>
+              <a:spcAft>
+                <a:spcPts val="1000"/>
+              </a:spcAft>
+              <a:buSzPct val="100000"/>
               <a:buChar char="•"/>
               <a:lnSpc>
                 <a:spcPts val="2200"/>
@@ -10892,10 +10914,12 @@
           </a:bodyPr>
           <a:lstStyle/>
           <a:p>
-            <a:pPr>
-              <a:spcAft>
-                <a:spcPts val="1000"/>
-              </a:spcAft>
+            <a:pPr lvl="0" marL="457200" indent="-228600">
+              <a:buFont typeface="Calibri"/>
+              <a:spcAft>
+                <a:spcPts val="1000"/>
+              </a:spcAft>
+              <a:buSzPct val="100000"/>
               <a:buChar char="•"/>
               <a:lnSpc>
                 <a:spcPts val="2200"/>
@@ -10912,10 +10936,12 @@
             </a:r>
           </a:p>
           <a:p>
-            <a:pPr>
-              <a:spcAft>
-                <a:spcPts val="1000"/>
-              </a:spcAft>
+            <a:pPr lvl="0" marL="457200" indent="-228600">
+              <a:buFont typeface="Calibri"/>
+              <a:spcAft>
+                <a:spcPts val="1000"/>
+              </a:spcAft>
+              <a:buSzPct val="100000"/>
               <a:buChar char="•"/>
               <a:lnSpc>
                 <a:spcPts val="2200"/>
@@ -10932,10 +10958,12 @@
             </a:r>
           </a:p>
           <a:p>
-            <a:pPr>
-              <a:spcAft>
-                <a:spcPts val="1000"/>
-              </a:spcAft>
+            <a:pPr lvl="0" marL="457200" indent="-228600">
+              <a:buFont typeface="Calibri"/>
+              <a:spcAft>
+                <a:spcPts val="1000"/>
+              </a:spcAft>
+              <a:buSzPct val="100000"/>
               <a:buChar char="•"/>
               <a:lnSpc>
                 <a:spcPts val="2200"/>
@@ -10952,10 +10980,12 @@
             </a:r>
           </a:p>
           <a:p>
-            <a:pPr>
-              <a:spcAft>
-                <a:spcPts val="1000"/>
-              </a:spcAft>
+            <a:pPr lvl="0" marL="457200" indent="-228600">
+              <a:buFont typeface="Calibri"/>
+              <a:spcAft>
+                <a:spcPts val="1000"/>
+              </a:spcAft>
+              <a:buSzPct val="100000"/>
               <a:buChar char="•"/>
               <a:lnSpc>
                 <a:spcPts val="2200"/>
@@ -10972,10 +11002,12 @@
             </a:r>
           </a:p>
           <a:p>
-            <a:pPr>
-              <a:spcAft>
-                <a:spcPts val="1000"/>
-              </a:spcAft>
+            <a:pPr lvl="0" marL="457200" indent="-228600">
+              <a:buFont typeface="Calibri"/>
+              <a:spcAft>
+                <a:spcPts val="1000"/>
+              </a:spcAft>
+              <a:buSzPct val="100000"/>
               <a:buChar char="•"/>
               <a:lnSpc>
                 <a:spcPts val="2200"/>
@@ -11111,10 +11143,12 @@
           </a:bodyPr>
           <a:lstStyle/>
           <a:p>
-            <a:pPr>
-              <a:spcAft>
-                <a:spcPts val="1000"/>
-              </a:spcAft>
+            <a:pPr lvl="0" marL="457200" indent="-228600">
+              <a:buFont typeface="Calibri"/>
+              <a:spcAft>
+                <a:spcPts val="1000"/>
+              </a:spcAft>
+              <a:buSzPct val="100000"/>
               <a:buChar char="•"/>
               <a:lnSpc>
                 <a:spcPts val="2200"/>
@@ -11131,10 +11165,12 @@
             </a:r>
           </a:p>
           <a:p>
-            <a:pPr>
-              <a:spcAft>
-                <a:spcPts val="1000"/>
-              </a:spcAft>
+            <a:pPr lvl="0" marL="457200" indent="-228600">
+              <a:buFont typeface="Calibri"/>
+              <a:spcAft>
+                <a:spcPts val="1000"/>
+              </a:spcAft>
+              <a:buSzPct val="100000"/>
               <a:buChar char="•"/>
               <a:lnSpc>
                 <a:spcPts val="2200"/>
@@ -11151,10 +11187,12 @@
             </a:r>
           </a:p>
           <a:p>
-            <a:pPr>
-              <a:spcAft>
-                <a:spcPts val="1000"/>
-              </a:spcAft>
+            <a:pPr lvl="0" marL="457200" indent="-228600">
+              <a:buFont typeface="Calibri"/>
+              <a:spcAft>
+                <a:spcPts val="1000"/>
+              </a:spcAft>
+              <a:buSzPct val="100000"/>
               <a:buChar char="•"/>
               <a:lnSpc>
                 <a:spcPts val="2200"/>
@@ -11171,10 +11209,12 @@
             </a:r>
           </a:p>
           <a:p>
-            <a:pPr>
-              <a:spcAft>
-                <a:spcPts val="1000"/>
-              </a:spcAft>
+            <a:pPr lvl="0" marL="457200" indent="-228600">
+              <a:buFont typeface="Calibri"/>
+              <a:spcAft>
+                <a:spcPts val="1000"/>
+              </a:spcAft>
+              <a:buSzPct val="100000"/>
               <a:buChar char="•"/>
               <a:lnSpc>
                 <a:spcPts val="2200"/>
@@ -11191,10 +11231,12 @@
             </a:r>
           </a:p>
           <a:p>
-            <a:pPr>
-              <a:spcAft>
-                <a:spcPts val="1000"/>
-              </a:spcAft>
+            <a:pPr lvl="0" marL="457200" indent="-228600">
+              <a:buFont typeface="Calibri"/>
+              <a:spcAft>
+                <a:spcPts val="1000"/>
+              </a:spcAft>
+              <a:buSzPct val="100000"/>
               <a:buChar char="•"/>
               <a:lnSpc>
                 <a:spcPts val="2200"/>
@@ -11330,10 +11372,12 @@
           </a:bodyPr>
           <a:lstStyle/>
           <a:p>
-            <a:pPr>
-              <a:spcAft>
-                <a:spcPts val="1000"/>
-              </a:spcAft>
+            <a:pPr lvl="0" marL="457200" indent="-228600">
+              <a:buFont typeface="Calibri"/>
+              <a:spcAft>
+                <a:spcPts val="1000"/>
+              </a:spcAft>
+              <a:buSzPct val="100000"/>
               <a:buChar char="•"/>
               <a:lnSpc>
                 <a:spcPts val="2200"/>
@@ -11350,10 +11394,12 @@
             </a:r>
           </a:p>
           <a:p>
-            <a:pPr>
-              <a:spcAft>
-                <a:spcPts val="1000"/>
-              </a:spcAft>
+            <a:pPr lvl="0" marL="457200" indent="-228600">
+              <a:buFont typeface="Calibri"/>
+              <a:spcAft>
+                <a:spcPts val="1000"/>
+              </a:spcAft>
+              <a:buSzPct val="100000"/>
               <a:buChar char="•"/>
               <a:lnSpc>
                 <a:spcPts val="2200"/>
@@ -11370,10 +11416,12 @@
             </a:r>
           </a:p>
           <a:p>
-            <a:pPr>
-              <a:spcAft>
-                <a:spcPts val="1000"/>
-              </a:spcAft>
+            <a:pPr lvl="0" marL="457200" indent="-228600">
+              <a:buFont typeface="Calibri"/>
+              <a:spcAft>
+                <a:spcPts val="1000"/>
+              </a:spcAft>
+              <a:buSzPct val="100000"/>
               <a:buChar char="•"/>
               <a:lnSpc>
                 <a:spcPts val="2200"/>
@@ -11390,10 +11438,12 @@
             </a:r>
           </a:p>
           <a:p>
-            <a:pPr>
-              <a:spcAft>
-                <a:spcPts val="1000"/>
-              </a:spcAft>
+            <a:pPr lvl="0" marL="457200" indent="-228600">
+              <a:buFont typeface="Calibri"/>
+              <a:spcAft>
+                <a:spcPts val="1000"/>
+              </a:spcAft>
+              <a:buSzPct val="100000"/>
               <a:buChar char="•"/>
               <a:lnSpc>
                 <a:spcPts val="2200"/>
@@ -11410,10 +11460,12 @@
             </a:r>
           </a:p>
           <a:p>
-            <a:pPr>
-              <a:spcAft>
-                <a:spcPts val="1000"/>
-              </a:spcAft>
+            <a:pPr lvl="0" marL="457200" indent="-228600">
+              <a:buFont typeface="Calibri"/>
+              <a:spcAft>
+                <a:spcPts val="1000"/>
+              </a:spcAft>
+              <a:buSzPct val="100000"/>
               <a:buChar char="•"/>
               <a:lnSpc>
                 <a:spcPts val="2200"/>
@@ -11549,10 +11601,12 @@
           </a:bodyPr>
           <a:lstStyle/>
           <a:p>
-            <a:pPr>
-              <a:spcAft>
-                <a:spcPts val="1000"/>
-              </a:spcAft>
+            <a:pPr lvl="0" marL="457200" indent="-228600">
+              <a:buFont typeface="Calibri"/>
+              <a:spcAft>
+                <a:spcPts val="1000"/>
+              </a:spcAft>
+              <a:buSzPct val="100000"/>
               <a:buChar char="•"/>
               <a:lnSpc>
                 <a:spcPts val="2200"/>
@@ -11569,10 +11623,12 @@
             </a:r>
           </a:p>
           <a:p>
-            <a:pPr>
-              <a:spcAft>
-                <a:spcPts val="1000"/>
-              </a:spcAft>
+            <a:pPr lvl="0" marL="457200" indent="-228600">
+              <a:buFont typeface="Calibri"/>
+              <a:spcAft>
+                <a:spcPts val="1000"/>
+              </a:spcAft>
+              <a:buSzPct val="100000"/>
               <a:buChar char="•"/>
               <a:lnSpc>
                 <a:spcPts val="2200"/>
@@ -11589,10 +11645,12 @@
             </a:r>
           </a:p>
           <a:p>
-            <a:pPr>
-              <a:spcAft>
-                <a:spcPts val="1000"/>
-              </a:spcAft>
+            <a:pPr lvl="0" marL="457200" indent="-228600">
+              <a:buFont typeface="Calibri"/>
+              <a:spcAft>
+                <a:spcPts val="1000"/>
+              </a:spcAft>
+              <a:buSzPct val="100000"/>
               <a:buChar char="•"/>
               <a:lnSpc>
                 <a:spcPts val="2200"/>
@@ -11728,10 +11786,12 @@
           </a:bodyPr>
           <a:lstStyle/>
           <a:p>
-            <a:pPr>
-              <a:spcAft>
-                <a:spcPts val="1000"/>
-              </a:spcAft>
+            <a:pPr lvl="0" marL="457200" indent="-228600">
+              <a:buFont typeface="Calibri"/>
+              <a:spcAft>
+                <a:spcPts val="1000"/>
+              </a:spcAft>
+              <a:buSzPct val="100000"/>
               <a:buChar char="•"/>
               <a:lnSpc>
                 <a:spcPts val="2200"/>
@@ -11748,10 +11808,12 @@
             </a:r>
           </a:p>
           <a:p>
-            <a:pPr>
-              <a:spcAft>
-                <a:spcPts val="1000"/>
-              </a:spcAft>
+            <a:pPr lvl="0" marL="457200" indent="-228600">
+              <a:buFont typeface="Calibri"/>
+              <a:spcAft>
+                <a:spcPts val="1000"/>
+              </a:spcAft>
+              <a:buSzPct val="100000"/>
               <a:buChar char="•"/>
               <a:lnSpc>
                 <a:spcPts val="2200"/>
@@ -11887,10 +11949,12 @@
           </a:bodyPr>
           <a:lstStyle/>
           <a:p>
-            <a:pPr>
-              <a:spcAft>
-                <a:spcPts val="1000"/>
-              </a:spcAft>
+            <a:pPr lvl="0" marL="457200" indent="-228600">
+              <a:buFont typeface="Calibri"/>
+              <a:spcAft>
+                <a:spcPts val="1000"/>
+              </a:spcAft>
+              <a:buSzPct val="100000"/>
               <a:buChar char="•"/>
               <a:lnSpc>
                 <a:spcPts val="2200"/>
@@ -12026,10 +12090,12 @@
           </a:bodyPr>
           <a:lstStyle/>
           <a:p>
-            <a:pPr>
-              <a:spcAft>
-                <a:spcPts val="1000"/>
-              </a:spcAft>
+            <a:pPr lvl="0" marL="457200" indent="-228600">
+              <a:buFont typeface="Calibri"/>
+              <a:spcAft>
+                <a:spcPts val="1000"/>
+              </a:spcAft>
+              <a:buSzPct val="100000"/>
               <a:buChar char="•"/>
               <a:lnSpc>
                 <a:spcPts val="2200"/>
@@ -12165,10 +12231,12 @@
           </a:bodyPr>
           <a:lstStyle/>
           <a:p>
-            <a:pPr>
-              <a:spcAft>
-                <a:spcPts val="1000"/>
-              </a:spcAft>
+            <a:pPr lvl="0" marL="457200" indent="-228600">
+              <a:buFont typeface="Calibri"/>
+              <a:spcAft>
+                <a:spcPts val="1000"/>
+              </a:spcAft>
+              <a:buSzPct val="100000"/>
               <a:buChar char="•"/>
               <a:lnSpc>
                 <a:spcPts val="2200"/>
@@ -12185,10 +12253,12 @@
             </a:r>
           </a:p>
           <a:p>
-            <a:pPr>
-              <a:spcAft>
-                <a:spcPts val="1000"/>
-              </a:spcAft>
+            <a:pPr lvl="0" marL="457200" indent="-228600">
+              <a:buFont typeface="Calibri"/>
+              <a:spcAft>
+                <a:spcPts val="1000"/>
+              </a:spcAft>
+              <a:buSzPct val="100000"/>
               <a:buChar char="•"/>
               <a:lnSpc>
                 <a:spcPts val="2200"/>
@@ -12205,10 +12275,12 @@
             </a:r>
           </a:p>
           <a:p>
-            <a:pPr>
-              <a:spcAft>
-                <a:spcPts val="1000"/>
-              </a:spcAft>
+            <a:pPr lvl="0" marL="457200" indent="-228600">
+              <a:buFont typeface="Calibri"/>
+              <a:spcAft>
+                <a:spcPts val="1000"/>
+              </a:spcAft>
+              <a:buSzPct val="100000"/>
               <a:buChar char="•"/>
               <a:lnSpc>
                 <a:spcPts val="2200"/>
@@ -12344,10 +12416,12 @@
           </a:bodyPr>
           <a:lstStyle/>
           <a:p>
-            <a:pPr>
-              <a:spcAft>
-                <a:spcPts val="1000"/>
-              </a:spcAft>
+            <a:pPr lvl="0" marL="457200" indent="-228600">
+              <a:buFont typeface="Calibri"/>
+              <a:spcAft>
+                <a:spcPts val="1000"/>
+              </a:spcAft>
+              <a:buSzPct val="100000"/>
               <a:buChar char="•"/>
               <a:lnSpc>
                 <a:spcPts val="2200"/>
@@ -12364,10 +12438,12 @@
             </a:r>
           </a:p>
           <a:p>
-            <a:pPr>
-              <a:spcAft>
-                <a:spcPts val="1000"/>
-              </a:spcAft>
+            <a:pPr lvl="0" marL="457200" indent="-228600">
+              <a:buFont typeface="Calibri"/>
+              <a:spcAft>
+                <a:spcPts val="1000"/>
+              </a:spcAft>
+              <a:buSzPct val="100000"/>
               <a:buChar char="•"/>
               <a:lnSpc>
                 <a:spcPts val="2200"/>
@@ -12384,10 +12460,12 @@
             </a:r>
           </a:p>
           <a:p>
-            <a:pPr>
-              <a:spcAft>
-                <a:spcPts val="1000"/>
-              </a:spcAft>
+            <a:pPr lvl="0" marL="457200" indent="-228600">
+              <a:buFont typeface="Calibri"/>
+              <a:spcAft>
+                <a:spcPts val="1000"/>
+              </a:spcAft>
+              <a:buSzPct val="100000"/>
               <a:buChar char="•"/>
               <a:lnSpc>
                 <a:spcPts val="2200"/>
@@ -12404,10 +12482,12 @@
             </a:r>
           </a:p>
           <a:p>
-            <a:pPr>
-              <a:spcAft>
-                <a:spcPts val="1000"/>
-              </a:spcAft>
+            <a:pPr lvl="0" marL="457200" indent="-228600">
+              <a:buFont typeface="Calibri"/>
+              <a:spcAft>
+                <a:spcPts val="1000"/>
+              </a:spcAft>
+              <a:buSzPct val="100000"/>
               <a:buChar char="•"/>
               <a:lnSpc>
                 <a:spcPts val="2200"/>
@@ -12543,10 +12623,12 @@
           </a:bodyPr>
           <a:lstStyle/>
           <a:p>
-            <a:pPr>
-              <a:spcAft>
-                <a:spcPts val="1000"/>
-              </a:spcAft>
+            <a:pPr lvl="0" marL="457200" indent="-228600">
+              <a:buFont typeface="Calibri"/>
+              <a:spcAft>
+                <a:spcPts val="1000"/>
+              </a:spcAft>
+              <a:buSzPct val="100000"/>
               <a:buChar char="•"/>
               <a:lnSpc>
                 <a:spcPts val="2200"/>
@@ -12563,10 +12645,12 @@
             </a:r>
           </a:p>
           <a:p>
-            <a:pPr>
-              <a:spcAft>
-                <a:spcPts val="1000"/>
-              </a:spcAft>
+            <a:pPr lvl="0" marL="457200" indent="-228600">
+              <a:buFont typeface="Calibri"/>
+              <a:spcAft>
+                <a:spcPts val="1000"/>
+              </a:spcAft>
+              <a:buSzPct val="100000"/>
               <a:buChar char="•"/>
               <a:lnSpc>
                 <a:spcPts val="2200"/>
@@ -12583,10 +12667,12 @@
             </a:r>
           </a:p>
           <a:p>
-            <a:pPr>
-              <a:spcAft>
-                <a:spcPts val="1000"/>
-              </a:spcAft>
+            <a:pPr lvl="0" marL="457200" indent="-228600">
+              <a:buFont typeface="Calibri"/>
+              <a:spcAft>
+                <a:spcPts val="1000"/>
+              </a:spcAft>
+              <a:buSzPct val="100000"/>
               <a:buChar char="•"/>
               <a:lnSpc>
                 <a:spcPts val="2200"/>
@@ -12603,10 +12689,12 @@
             </a:r>
           </a:p>
           <a:p>
-            <a:pPr>
-              <a:spcAft>
-                <a:spcPts val="1000"/>
-              </a:spcAft>
+            <a:pPr lvl="0" marL="457200" indent="-228600">
+              <a:buFont typeface="Calibri"/>
+              <a:spcAft>
+                <a:spcPts val="1000"/>
+              </a:spcAft>
+              <a:buSzPct val="100000"/>
               <a:buChar char="•"/>
               <a:lnSpc>
                 <a:spcPts val="2200"/>
@@ -12623,10 +12711,12 @@
             </a:r>
           </a:p>
           <a:p>
-            <a:pPr>
-              <a:spcAft>
-                <a:spcPts val="1000"/>
-              </a:spcAft>
+            <a:pPr lvl="0" marL="457200" indent="-228600">
+              <a:buFont typeface="Calibri"/>
+              <a:spcAft>
+                <a:spcPts val="1000"/>
+              </a:spcAft>
+              <a:buSzPct val="100000"/>
               <a:buChar char="•"/>
               <a:lnSpc>
                 <a:spcPts val="2200"/>
@@ -12643,10 +12733,12 @@
             </a:r>
           </a:p>
           <a:p>
-            <a:pPr>
-              <a:spcAft>
-                <a:spcPts val="1000"/>
-              </a:spcAft>
+            <a:pPr lvl="0" marL="457200" indent="-228600">
+              <a:buFont typeface="Calibri"/>
+              <a:spcAft>
+                <a:spcPts val="1000"/>
+              </a:spcAft>
+              <a:buSzPct val="100000"/>
               <a:buChar char="•"/>
               <a:lnSpc>
                 <a:spcPts val="2200"/>
@@ -12782,10 +12874,12 @@
           </a:bodyPr>
           <a:lstStyle/>
           <a:p>
-            <a:pPr>
-              <a:spcAft>
-                <a:spcPts val="1000"/>
-              </a:spcAft>
+            <a:pPr lvl="0" marL="457200" indent="-228600">
+              <a:buFont typeface="Calibri"/>
+              <a:spcAft>
+                <a:spcPts val="1000"/>
+              </a:spcAft>
+              <a:buSzPct val="100000"/>
               <a:buChar char="•"/>
               <a:lnSpc>
                 <a:spcPts val="2200"/>
@@ -12802,10 +12896,12 @@
             </a:r>
           </a:p>
           <a:p>
-            <a:pPr>
-              <a:spcAft>
-                <a:spcPts val="1000"/>
-              </a:spcAft>
+            <a:pPr lvl="0" marL="457200" indent="-228600">
+              <a:buFont typeface="Calibri"/>
+              <a:spcAft>
+                <a:spcPts val="1000"/>
+              </a:spcAft>
+              <a:buSzPct val="100000"/>
               <a:buChar char="•"/>
               <a:lnSpc>
                 <a:spcPts val="2200"/>
@@ -12822,10 +12918,12 @@
             </a:r>
           </a:p>
           <a:p>
-            <a:pPr>
-              <a:spcAft>
-                <a:spcPts val="1000"/>
-              </a:spcAft>
+            <a:pPr lvl="0" marL="457200" indent="-228600">
+              <a:buFont typeface="Calibri"/>
+              <a:spcAft>
+                <a:spcPts val="1000"/>
+              </a:spcAft>
+              <a:buSzPct val="100000"/>
               <a:buChar char="•"/>
               <a:lnSpc>
                 <a:spcPts val="2200"/>
@@ -12961,10 +13059,12 @@
           </a:bodyPr>
           <a:lstStyle/>
           <a:p>
-            <a:pPr>
-              <a:spcAft>
-                <a:spcPts val="1000"/>
-              </a:spcAft>
+            <a:pPr lvl="0" marL="457200" indent="-228600">
+              <a:buFont typeface="Calibri"/>
+              <a:spcAft>
+                <a:spcPts val="1000"/>
+              </a:spcAft>
+              <a:buSzPct val="100000"/>
               <a:buChar char="•"/>
               <a:lnSpc>
                 <a:spcPts val="2200"/>
@@ -12981,10 +13081,12 @@
             </a:r>
           </a:p>
           <a:p>
-            <a:pPr>
-              <a:spcAft>
-                <a:spcPts val="1000"/>
-              </a:spcAft>
+            <a:pPr lvl="0" marL="457200" indent="-228600">
+              <a:buFont typeface="Calibri"/>
+              <a:spcAft>
+                <a:spcPts val="1000"/>
+              </a:spcAft>
+              <a:buSzPct val="100000"/>
               <a:buChar char="•"/>
               <a:lnSpc>
                 <a:spcPts val="2200"/>
@@ -13001,10 +13103,12 @@
             </a:r>
           </a:p>
           <a:p>
-            <a:pPr>
-              <a:spcAft>
-                <a:spcPts val="1000"/>
-              </a:spcAft>
+            <a:pPr lvl="0" marL="457200" indent="-228600">
+              <a:buFont typeface="Calibri"/>
+              <a:spcAft>
+                <a:spcPts val="1000"/>
+              </a:spcAft>
+              <a:buSzPct val="100000"/>
               <a:buChar char="•"/>
               <a:lnSpc>
                 <a:spcPts val="2200"/>
@@ -13140,10 +13244,12 @@
           </a:bodyPr>
           <a:lstStyle/>
           <a:p>
-            <a:pPr>
-              <a:spcAft>
-                <a:spcPts val="1000"/>
-              </a:spcAft>
+            <a:pPr lvl="0" marL="457200" indent="-228600">
+              <a:buFont typeface="Calibri"/>
+              <a:spcAft>
+                <a:spcPts val="1000"/>
+              </a:spcAft>
+              <a:buSzPct val="100000"/>
               <a:buChar char="•"/>
               <a:lnSpc>
                 <a:spcPts val="2200"/>
@@ -13160,10 +13266,12 @@
             </a:r>
           </a:p>
           <a:p>
-            <a:pPr>
-              <a:spcAft>
-                <a:spcPts val="1000"/>
-              </a:spcAft>
+            <a:pPr lvl="0" marL="457200" indent="-228600">
+              <a:buFont typeface="Calibri"/>
+              <a:spcAft>
+                <a:spcPts val="1000"/>
+              </a:spcAft>
+              <a:buSzPct val="100000"/>
               <a:buChar char="•"/>
               <a:lnSpc>
                 <a:spcPts val="2200"/>
@@ -13180,10 +13288,12 @@
             </a:r>
           </a:p>
           <a:p>
-            <a:pPr>
-              <a:spcAft>
-                <a:spcPts val="1000"/>
-              </a:spcAft>
+            <a:pPr lvl="0" marL="457200" indent="-228600">
+              <a:buFont typeface="Calibri"/>
+              <a:spcAft>
+                <a:spcPts val="1000"/>
+              </a:spcAft>
+              <a:buSzPct val="100000"/>
               <a:buChar char="•"/>
               <a:lnSpc>
                 <a:spcPts val="2200"/>
@@ -13200,10 +13310,12 @@
             </a:r>
           </a:p>
           <a:p>
-            <a:pPr>
-              <a:spcAft>
-                <a:spcPts val="1000"/>
-              </a:spcAft>
+            <a:pPr lvl="0" marL="457200" indent="-228600">
+              <a:buFont typeface="Calibri"/>
+              <a:spcAft>
+                <a:spcPts val="1000"/>
+              </a:spcAft>
+              <a:buSzPct val="100000"/>
               <a:buChar char="•"/>
               <a:lnSpc>
                 <a:spcPts val="2200"/>
@@ -13339,10 +13451,12 @@
           </a:bodyPr>
           <a:lstStyle/>
           <a:p>
-            <a:pPr>
-              <a:spcAft>
-                <a:spcPts val="1000"/>
-              </a:spcAft>
+            <a:pPr lvl="0" marL="457200" indent="-228600">
+              <a:buFont typeface="Calibri"/>
+              <a:spcAft>
+                <a:spcPts val="1000"/>
+              </a:spcAft>
+              <a:buSzPct val="100000"/>
               <a:buChar char="•"/>
               <a:lnSpc>
                 <a:spcPts val="2200"/>
@@ -13359,10 +13473,12 @@
             </a:r>
           </a:p>
           <a:p>
-            <a:pPr>
-              <a:spcAft>
-                <a:spcPts val="1000"/>
-              </a:spcAft>
+            <a:pPr lvl="0" marL="457200" indent="-228600">
+              <a:buFont typeface="Calibri"/>
+              <a:spcAft>
+                <a:spcPts val="1000"/>
+              </a:spcAft>
+              <a:buSzPct val="100000"/>
               <a:buChar char="•"/>
               <a:lnSpc>
                 <a:spcPts val="2200"/>
@@ -13379,10 +13495,12 @@
             </a:r>
           </a:p>
           <a:p>
-            <a:pPr>
-              <a:spcAft>
-                <a:spcPts val="1000"/>
-              </a:spcAft>
+            <a:pPr lvl="0" marL="457200" indent="-228600">
+              <a:buFont typeface="Calibri"/>
+              <a:spcAft>
+                <a:spcPts val="1000"/>
+              </a:spcAft>
+              <a:buSzPct val="100000"/>
               <a:buChar char="•"/>
               <a:lnSpc>
                 <a:spcPts val="2200"/>
@@ -13518,10 +13636,12 @@
           </a:bodyPr>
           <a:lstStyle/>
           <a:p>
-            <a:pPr>
-              <a:spcAft>
-                <a:spcPts val="1000"/>
-              </a:spcAft>
+            <a:pPr lvl="0" marL="457200" indent="-228600">
+              <a:buFont typeface="Calibri"/>
+              <a:spcAft>
+                <a:spcPts val="1000"/>
+              </a:spcAft>
+              <a:buSzPct val="100000"/>
               <a:buChar char="•"/>
               <a:lnSpc>
                 <a:spcPts val="2200"/>
@@ -13538,10 +13658,12 @@
             </a:r>
           </a:p>
           <a:p>
-            <a:pPr>
-              <a:spcAft>
-                <a:spcPts val="1000"/>
-              </a:spcAft>
+            <a:pPr lvl="0" marL="457200" indent="-228600">
+              <a:buFont typeface="Calibri"/>
+              <a:spcAft>
+                <a:spcPts val="1000"/>
+              </a:spcAft>
+              <a:buSzPct val="100000"/>
               <a:buChar char="•"/>
               <a:lnSpc>
                 <a:spcPts val="2200"/>
@@ -13677,10 +13799,12 @@
           </a:bodyPr>
           <a:lstStyle/>
           <a:p>
-            <a:pPr>
-              <a:spcAft>
-                <a:spcPts val="1000"/>
-              </a:spcAft>
+            <a:pPr lvl="0" marL="457200" indent="-228600">
+              <a:buFont typeface="Calibri"/>
+              <a:spcAft>
+                <a:spcPts val="1000"/>
+              </a:spcAft>
+              <a:buSzPct val="100000"/>
               <a:buChar char="•"/>
               <a:lnSpc>
                 <a:spcPts val="2200"/>
@@ -13816,10 +13940,12 @@
           </a:bodyPr>
           <a:lstStyle/>
           <a:p>
-            <a:pPr>
-              <a:spcAft>
-                <a:spcPts val="1000"/>
-              </a:spcAft>
+            <a:pPr lvl="0" marL="457200" indent="-228600">
+              <a:buFont typeface="Calibri"/>
+              <a:spcAft>
+                <a:spcPts val="1000"/>
+              </a:spcAft>
+              <a:buSzPct val="100000"/>
               <a:buChar char="•"/>
               <a:lnSpc>
                 <a:spcPts val="2200"/>
@@ -13836,10 +13962,12 @@
             </a:r>
           </a:p>
           <a:p>
-            <a:pPr>
-              <a:spcAft>
-                <a:spcPts val="1000"/>
-              </a:spcAft>
+            <a:pPr lvl="0" marL="457200" indent="-228600">
+              <a:buFont typeface="Calibri"/>
+              <a:spcAft>
+                <a:spcPts val="1000"/>
+              </a:spcAft>
+              <a:buSzPct val="100000"/>
               <a:buChar char="•"/>
               <a:lnSpc>
                 <a:spcPts val="2200"/>
@@ -13856,10 +13984,12 @@
             </a:r>
           </a:p>
           <a:p>
-            <a:pPr>
-              <a:spcAft>
-                <a:spcPts val="1000"/>
-              </a:spcAft>
+            <a:pPr lvl="0" marL="457200" indent="-228600">
+              <a:buFont typeface="Calibri"/>
+              <a:spcAft>
+                <a:spcPts val="1000"/>
+              </a:spcAft>
+              <a:buSzPct val="100000"/>
               <a:buChar char="•"/>
               <a:lnSpc>
                 <a:spcPts val="2200"/>
@@ -13995,10 +14125,12 @@
           </a:bodyPr>
           <a:lstStyle/>
           <a:p>
-            <a:pPr>
-              <a:spcAft>
-                <a:spcPts val="1000"/>
-              </a:spcAft>
+            <a:pPr lvl="0" marL="457200" indent="-228600">
+              <a:buFont typeface="Calibri"/>
+              <a:spcAft>
+                <a:spcPts val="1000"/>
+              </a:spcAft>
+              <a:buSzPct val="100000"/>
               <a:buChar char="•"/>
               <a:lnSpc>
                 <a:spcPts val="2200"/>
@@ -14015,10 +14147,12 @@
             </a:r>
           </a:p>
           <a:p>
-            <a:pPr>
-              <a:spcAft>
-                <a:spcPts val="1000"/>
-              </a:spcAft>
+            <a:pPr lvl="0" marL="457200" indent="-228600">
+              <a:buFont typeface="Calibri"/>
+              <a:spcAft>
+                <a:spcPts val="1000"/>
+              </a:spcAft>
+              <a:buSzPct val="100000"/>
               <a:buChar char="•"/>
               <a:lnSpc>
                 <a:spcPts val="2200"/>
@@ -14035,10 +14169,12 @@
             </a:r>
           </a:p>
           <a:p>
-            <a:pPr>
-              <a:spcAft>
-                <a:spcPts val="1000"/>
-              </a:spcAft>
+            <a:pPr lvl="0" marL="457200" indent="-228600">
+              <a:buFont typeface="Calibri"/>
+              <a:spcAft>
+                <a:spcPts val="1000"/>
+              </a:spcAft>
+              <a:buSzPct val="100000"/>
               <a:buChar char="•"/>
               <a:lnSpc>
                 <a:spcPts val="2200"/>
@@ -14174,10 +14310,12 @@
           </a:bodyPr>
           <a:lstStyle/>
           <a:p>
-            <a:pPr>
-              <a:spcAft>
-                <a:spcPts val="1000"/>
-              </a:spcAft>
+            <a:pPr lvl="0" marL="457200" indent="-228600">
+              <a:buFont typeface="Calibri"/>
+              <a:spcAft>
+                <a:spcPts val="1000"/>
+              </a:spcAft>
+              <a:buSzPct val="100000"/>
               <a:buChar char="•"/>
               <a:lnSpc>
                 <a:spcPts val="2200"/>
@@ -14194,10 +14332,12 @@
             </a:r>
           </a:p>
           <a:p>
-            <a:pPr>
-              <a:spcAft>
-                <a:spcPts val="1000"/>
-              </a:spcAft>
+            <a:pPr lvl="0" marL="457200" indent="-228600">
+              <a:buFont typeface="Calibri"/>
+              <a:spcAft>
+                <a:spcPts val="1000"/>
+              </a:spcAft>
+              <a:buSzPct val="100000"/>
               <a:buChar char="•"/>
               <a:lnSpc>
                 <a:spcPts val="2200"/>
@@ -14214,10 +14354,12 @@
             </a:r>
           </a:p>
           <a:p>
-            <a:pPr>
-              <a:spcAft>
-                <a:spcPts val="1000"/>
-              </a:spcAft>
+            <a:pPr lvl="0" marL="457200" indent="-228600">
+              <a:buFont typeface="Calibri"/>
+              <a:spcAft>
+                <a:spcPts val="1000"/>
+              </a:spcAft>
+              <a:buSzPct val="100000"/>
               <a:buChar char="•"/>
               <a:lnSpc>
                 <a:spcPts val="2200"/>
@@ -14353,10 +14495,12 @@
           </a:bodyPr>
           <a:lstStyle/>
           <a:p>
-            <a:pPr>
-              <a:spcAft>
-                <a:spcPts val="1000"/>
-              </a:spcAft>
+            <a:pPr lvl="0" marL="457200" indent="-228600">
+              <a:buFont typeface="Calibri"/>
+              <a:spcAft>
+                <a:spcPts val="1000"/>
+              </a:spcAft>
+              <a:buSzPct val="100000"/>
               <a:buChar char="•"/>
               <a:lnSpc>
                 <a:spcPts val="2200"/>
@@ -14373,10 +14517,12 @@
             </a:r>
           </a:p>
           <a:p>
-            <a:pPr>
-              <a:spcAft>
-                <a:spcPts val="1000"/>
-              </a:spcAft>
+            <a:pPr lvl="0" marL="457200" indent="-228600">
+              <a:buFont typeface="Calibri"/>
+              <a:spcAft>
+                <a:spcPts val="1000"/>
+              </a:spcAft>
+              <a:buSzPct val="100000"/>
               <a:buChar char="•"/>
               <a:lnSpc>
                 <a:spcPts val="2200"/>
@@ -14512,10 +14658,12 @@
           </a:bodyPr>
           <a:lstStyle/>
           <a:p>
-            <a:pPr>
-              <a:spcAft>
-                <a:spcPts val="1000"/>
-              </a:spcAft>
+            <a:pPr lvl="0" marL="457200" indent="-228600">
+              <a:buFont typeface="Calibri"/>
+              <a:spcAft>
+                <a:spcPts val="1000"/>
+              </a:spcAft>
+              <a:buSzPct val="100000"/>
               <a:buChar char="•"/>
               <a:lnSpc>
                 <a:spcPts val="2200"/>
@@ -14532,10 +14680,12 @@
             </a:r>
           </a:p>
           <a:p>
-            <a:pPr>
-              <a:spcAft>
-                <a:spcPts val="1000"/>
-              </a:spcAft>
+            <a:pPr lvl="0" marL="457200" indent="-228600">
+              <a:buFont typeface="Calibri"/>
+              <a:spcAft>
+                <a:spcPts val="1000"/>
+              </a:spcAft>
+              <a:buSzPct val="100000"/>
               <a:buChar char="•"/>
               <a:lnSpc>
                 <a:spcPts val="2200"/>
@@ -14552,10 +14702,12 @@
             </a:r>
           </a:p>
           <a:p>
-            <a:pPr>
-              <a:spcAft>
-                <a:spcPts val="1000"/>
-              </a:spcAft>
+            <a:pPr lvl="0" marL="457200" indent="-228600">
+              <a:buFont typeface="Calibri"/>
+              <a:spcAft>
+                <a:spcPts val="1000"/>
+              </a:spcAft>
+              <a:buSzPct val="100000"/>
               <a:buChar char="•"/>
               <a:lnSpc>
                 <a:spcPts val="2200"/>
@@ -14691,10 +14843,12 @@
           </a:bodyPr>
           <a:lstStyle/>
           <a:p>
-            <a:pPr>
-              <a:spcAft>
-                <a:spcPts val="1000"/>
-              </a:spcAft>
+            <a:pPr lvl="0" marL="457200" indent="-228600">
+              <a:buFont typeface="Calibri"/>
+              <a:spcAft>
+                <a:spcPts val="1000"/>
+              </a:spcAft>
+              <a:buSzPct val="100000"/>
               <a:buChar char="•"/>
               <a:lnSpc>
                 <a:spcPts val="2200"/>
@@ -14711,10 +14865,12 @@
             </a:r>
           </a:p>
           <a:p>
-            <a:pPr>
-              <a:spcAft>
-                <a:spcPts val="1000"/>
-              </a:spcAft>
+            <a:pPr lvl="0" marL="457200" indent="-228600">
+              <a:buFont typeface="Calibri"/>
+              <a:spcAft>
+                <a:spcPts val="1000"/>
+              </a:spcAft>
+              <a:buSzPct val="100000"/>
               <a:buChar char="•"/>
               <a:lnSpc>
                 <a:spcPts val="2200"/>
@@ -14731,10 +14887,12 @@
             </a:r>
           </a:p>
           <a:p>
-            <a:pPr>
-              <a:spcAft>
-                <a:spcPts val="1000"/>
-              </a:spcAft>
+            <a:pPr lvl="0" marL="457200" indent="-228600">
+              <a:buFont typeface="Calibri"/>
+              <a:spcAft>
+                <a:spcPts val="1000"/>
+              </a:spcAft>
+              <a:buSzPct val="100000"/>
               <a:buChar char="•"/>
               <a:lnSpc>
                 <a:spcPts val="2200"/>
@@ -14870,10 +15028,12 @@
           </a:bodyPr>
           <a:lstStyle/>
           <a:p>
-            <a:pPr>
-              <a:spcAft>
-                <a:spcPts val="1000"/>
-              </a:spcAft>
+            <a:pPr lvl="0" marL="457200" indent="-228600">
+              <a:buFont typeface="Calibri"/>
+              <a:spcAft>
+                <a:spcPts val="1000"/>
+              </a:spcAft>
+              <a:buSzPct val="100000"/>
               <a:buChar char="•"/>
               <a:lnSpc>
                 <a:spcPts val="2200"/>
@@ -14890,10 +15050,12 @@
             </a:r>
           </a:p>
           <a:p>
-            <a:pPr>
-              <a:spcAft>
-                <a:spcPts val="1000"/>
-              </a:spcAft>
+            <a:pPr lvl="0" marL="457200" indent="-228600">
+              <a:buFont typeface="Calibri"/>
+              <a:spcAft>
+                <a:spcPts val="1000"/>
+              </a:spcAft>
+              <a:buSzPct val="100000"/>
               <a:buChar char="•"/>
               <a:lnSpc>
                 <a:spcPts val="2200"/>
@@ -14910,10 +15072,12 @@
             </a:r>
           </a:p>
           <a:p>
-            <a:pPr>
-              <a:spcAft>
-                <a:spcPts val="1000"/>
-              </a:spcAft>
+            <a:pPr lvl="0" marL="457200" indent="-228600">
+              <a:buFont typeface="Calibri"/>
+              <a:spcAft>
+                <a:spcPts val="1000"/>
+              </a:spcAft>
+              <a:buSzPct val="100000"/>
               <a:buChar char="•"/>
               <a:lnSpc>
                 <a:spcPts val="2200"/>
@@ -15049,10 +15213,12 @@
           </a:bodyPr>
           <a:lstStyle/>
           <a:p>
-            <a:pPr>
-              <a:spcAft>
-                <a:spcPts val="1000"/>
-              </a:spcAft>
+            <a:pPr lvl="0" marL="457200" indent="-228600">
+              <a:buFont typeface="Calibri"/>
+              <a:spcAft>
+                <a:spcPts val="1000"/>
+              </a:spcAft>
+              <a:buSzPct val="100000"/>
               <a:buChar char="•"/>
               <a:lnSpc>
                 <a:spcPts val="2200"/>
@@ -15069,10 +15235,12 @@
             </a:r>
           </a:p>
           <a:p>
-            <a:pPr>
-              <a:spcAft>
-                <a:spcPts val="1000"/>
-              </a:spcAft>
+            <a:pPr lvl="0" marL="457200" indent="-228600">
+              <a:buFont typeface="Calibri"/>
+              <a:spcAft>
+                <a:spcPts val="1000"/>
+              </a:spcAft>
+              <a:buSzPct val="100000"/>
               <a:buChar char="•"/>
               <a:lnSpc>
                 <a:spcPts val="2200"/>
@@ -15089,10 +15257,12 @@
             </a:r>
           </a:p>
           <a:p>
-            <a:pPr>
-              <a:spcAft>
-                <a:spcPts val="1000"/>
-              </a:spcAft>
+            <a:pPr lvl="0" marL="457200" indent="-228600">
+              <a:buFont typeface="Calibri"/>
+              <a:spcAft>
+                <a:spcPts val="1000"/>
+              </a:spcAft>
+              <a:buSzPct val="100000"/>
               <a:buChar char="•"/>
               <a:lnSpc>
                 <a:spcPts val="2200"/>
@@ -15228,10 +15398,12 @@
           </a:bodyPr>
           <a:lstStyle/>
           <a:p>
-            <a:pPr>
-              <a:spcAft>
-                <a:spcPts val="1000"/>
-              </a:spcAft>
+            <a:pPr lvl="0" marL="457200" indent="-228600">
+              <a:buFont typeface="Calibri"/>
+              <a:spcAft>
+                <a:spcPts val="1000"/>
+              </a:spcAft>
+              <a:buSzPct val="100000"/>
               <a:buChar char="•"/>
               <a:lnSpc>
                 <a:spcPts val="2200"/>
@@ -15248,10 +15420,12 @@
             </a:r>
           </a:p>
           <a:p>
-            <a:pPr>
-              <a:spcAft>
-                <a:spcPts val="1000"/>
-              </a:spcAft>
+            <a:pPr lvl="0" marL="457200" indent="-228600">
+              <a:buFont typeface="Calibri"/>
+              <a:spcAft>
+                <a:spcPts val="1000"/>
+              </a:spcAft>
+              <a:buSzPct val="100000"/>
               <a:buChar char="•"/>
               <a:lnSpc>
                 <a:spcPts val="2200"/>
@@ -15387,10 +15561,12 @@
           </a:bodyPr>
           <a:lstStyle/>
           <a:p>
-            <a:pPr>
-              <a:spcAft>
-                <a:spcPts val="1000"/>
-              </a:spcAft>
+            <a:pPr lvl="0" marL="457200" indent="-228600">
+              <a:buFont typeface="Calibri"/>
+              <a:spcAft>
+                <a:spcPts val="1000"/>
+              </a:spcAft>
+              <a:buSzPct val="100000"/>
               <a:buChar char="•"/>
               <a:lnSpc>
                 <a:spcPts val="2200"/>
@@ -15526,10 +15702,12 @@
           </a:bodyPr>
           <a:lstStyle/>
           <a:p>
-            <a:pPr>
-              <a:spcAft>
-                <a:spcPts val="1000"/>
-              </a:spcAft>
+            <a:pPr lvl="0" marL="457200" indent="-228600">
+              <a:buFont typeface="Calibri"/>
+              <a:spcAft>
+                <a:spcPts val="1000"/>
+              </a:spcAft>
+              <a:buSzPct val="100000"/>
               <a:buChar char="•"/>
               <a:lnSpc>
                 <a:spcPts val="2200"/>
@@ -15546,10 +15724,12 @@
             </a:r>
           </a:p>
           <a:p>
-            <a:pPr>
-              <a:spcAft>
-                <a:spcPts val="1000"/>
-              </a:spcAft>
+            <a:pPr lvl="0" marL="457200" indent="-228600">
+              <a:buFont typeface="Calibri"/>
+              <a:spcAft>
+                <a:spcPts val="1000"/>
+              </a:spcAft>
+              <a:buSzPct val="100000"/>
               <a:buChar char="•"/>
               <a:lnSpc>
                 <a:spcPts val="2200"/>
@@ -15566,10 +15746,12 @@
             </a:r>
           </a:p>
           <a:p>
-            <a:pPr>
-              <a:spcAft>
-                <a:spcPts val="1000"/>
-              </a:spcAft>
+            <a:pPr lvl="0" marL="457200" indent="-228600">
+              <a:buFont typeface="Calibri"/>
+              <a:spcAft>
+                <a:spcPts val="1000"/>
+              </a:spcAft>
+              <a:buSzPct val="100000"/>
               <a:buChar char="•"/>
               <a:lnSpc>
                 <a:spcPts val="2200"/>
@@ -15705,10 +15887,12 @@
           </a:bodyPr>
           <a:lstStyle/>
           <a:p>
-            <a:pPr>
-              <a:spcAft>
-                <a:spcPts val="1000"/>
-              </a:spcAft>
+            <a:pPr lvl="0" marL="457200" indent="-228600">
+              <a:buFont typeface="Calibri"/>
+              <a:spcAft>
+                <a:spcPts val="1000"/>
+              </a:spcAft>
+              <a:buSzPct val="100000"/>
               <a:buChar char="•"/>
               <a:lnSpc>
                 <a:spcPts val="2200"/>
@@ -15725,10 +15909,12 @@
             </a:r>
           </a:p>
           <a:p>
-            <a:pPr>
-              <a:spcAft>
-                <a:spcPts val="1000"/>
-              </a:spcAft>
+            <a:pPr lvl="0" marL="457200" indent="-228600">
+              <a:buFont typeface="Calibri"/>
+              <a:spcAft>
+                <a:spcPts val="1000"/>
+              </a:spcAft>
+              <a:buSzPct val="100000"/>
               <a:buChar char="•"/>
               <a:lnSpc>
                 <a:spcPts val="2200"/>
@@ -15745,10 +15931,12 @@
             </a:r>
           </a:p>
           <a:p>
-            <a:pPr>
-              <a:spcAft>
-                <a:spcPts val="1000"/>
-              </a:spcAft>
+            <a:pPr lvl="0" marL="457200" indent="-228600">
+              <a:buFont typeface="Calibri"/>
+              <a:spcAft>
+                <a:spcPts val="1000"/>
+              </a:spcAft>
+              <a:buSzPct val="100000"/>
               <a:buChar char="•"/>
               <a:lnSpc>
                 <a:spcPts val="2200"/>
@@ -15765,10 +15953,12 @@
             </a:r>
           </a:p>
           <a:p>
-            <a:pPr>
-              <a:spcAft>
-                <a:spcPts val="1000"/>
-              </a:spcAft>
+            <a:pPr lvl="0" marL="457200" indent="-228600">
+              <a:buFont typeface="Calibri"/>
+              <a:spcAft>
+                <a:spcPts val="1000"/>
+              </a:spcAft>
+              <a:buSzPct val="100000"/>
               <a:buChar char="•"/>
               <a:lnSpc>
                 <a:spcPts val="2200"/>
@@ -15785,10 +15975,12 @@
             </a:r>
           </a:p>
           <a:p>
-            <a:pPr>
-              <a:spcAft>
-                <a:spcPts val="1000"/>
-              </a:spcAft>
+            <a:pPr lvl="0" marL="457200" indent="-228600">
+              <a:buFont typeface="Calibri"/>
+              <a:spcAft>
+                <a:spcPts val="1000"/>
+              </a:spcAft>
+              <a:buSzPct val="100000"/>
               <a:buChar char="•"/>
               <a:lnSpc>
                 <a:spcPts val="2200"/>
@@ -15805,10 +15997,12 @@
             </a:r>
           </a:p>
           <a:p>
-            <a:pPr>
-              <a:spcAft>
-                <a:spcPts val="1000"/>
-              </a:spcAft>
+            <a:pPr lvl="0" marL="457200" indent="-228600">
+              <a:buFont typeface="Calibri"/>
+              <a:spcAft>
+                <a:spcPts val="1000"/>
+              </a:spcAft>
+              <a:buSzPct val="100000"/>
               <a:buChar char="•"/>
               <a:lnSpc>
                 <a:spcPts val="2200"/>
@@ -15944,10 +16138,12 @@
           </a:bodyPr>
           <a:lstStyle/>
           <a:p>
-            <a:pPr>
-              <a:spcAft>
-                <a:spcPts val="1000"/>
-              </a:spcAft>
+            <a:pPr lvl="0" marL="457200" indent="-228600">
+              <a:buFont typeface="Calibri"/>
+              <a:spcAft>
+                <a:spcPts val="1000"/>
+              </a:spcAft>
+              <a:buSzPct val="100000"/>
               <a:buChar char="•"/>
               <a:lnSpc>
                 <a:spcPts val="2200"/>
@@ -15964,10 +16160,12 @@
             </a:r>
           </a:p>
           <a:p>
-            <a:pPr>
-              <a:spcAft>
-                <a:spcPts val="1000"/>
-              </a:spcAft>
+            <a:pPr lvl="0" marL="457200" indent="-228600">
+              <a:buFont typeface="Calibri"/>
+              <a:spcAft>
+                <a:spcPts val="1000"/>
+              </a:spcAft>
+              <a:buSzPct val="100000"/>
               <a:buChar char="•"/>
               <a:lnSpc>
                 <a:spcPts val="2200"/>
@@ -15984,10 +16182,12 @@
             </a:r>
           </a:p>
           <a:p>
-            <a:pPr>
-              <a:spcAft>
-                <a:spcPts val="1000"/>
-              </a:spcAft>
+            <a:pPr lvl="0" marL="457200" indent="-228600">
+              <a:buFont typeface="Calibri"/>
+              <a:spcAft>
+                <a:spcPts val="1000"/>
+              </a:spcAft>
+              <a:buSzPct val="100000"/>
               <a:buChar char="•"/>
               <a:lnSpc>
                 <a:spcPts val="2200"/>
@@ -16004,10 +16204,12 @@
             </a:r>
           </a:p>
           <a:p>
-            <a:pPr>
-              <a:spcAft>
-                <a:spcPts val="1000"/>
-              </a:spcAft>
+            <a:pPr lvl="0" marL="457200" indent="-228600">
+              <a:buFont typeface="Calibri"/>
+              <a:spcAft>
+                <a:spcPts val="1000"/>
+              </a:spcAft>
+              <a:buSzPct val="100000"/>
               <a:buChar char="•"/>
               <a:lnSpc>
                 <a:spcPts val="2200"/>
@@ -16143,10 +16345,12 @@
           </a:bodyPr>
           <a:lstStyle/>
           <a:p>
-            <a:pPr>
-              <a:spcAft>
-                <a:spcPts val="1000"/>
-              </a:spcAft>
+            <a:pPr lvl="0" marL="457200" indent="-228600">
+              <a:buFont typeface="Calibri"/>
+              <a:spcAft>
+                <a:spcPts val="1000"/>
+              </a:spcAft>
+              <a:buSzPct val="100000"/>
               <a:buChar char="•"/>
               <a:lnSpc>
                 <a:spcPts val="2200"/>
@@ -16163,10 +16367,12 @@
             </a:r>
           </a:p>
           <a:p>
-            <a:pPr>
-              <a:spcAft>
-                <a:spcPts val="1000"/>
-              </a:spcAft>
+            <a:pPr lvl="0" marL="457200" indent="-228600">
+              <a:buFont typeface="Calibri"/>
+              <a:spcAft>
+                <a:spcPts val="1000"/>
+              </a:spcAft>
+              <a:buSzPct val="100000"/>
               <a:buChar char="•"/>
               <a:lnSpc>
                 <a:spcPts val="2200"/>
@@ -16183,10 +16389,12 @@
             </a:r>
           </a:p>
           <a:p>
-            <a:pPr>
-              <a:spcAft>
-                <a:spcPts val="1000"/>
-              </a:spcAft>
+            <a:pPr lvl="0" marL="457200" indent="-228600">
+              <a:buFont typeface="Calibri"/>
+              <a:spcAft>
+                <a:spcPts val="1000"/>
+              </a:spcAft>
+              <a:buSzPct val="100000"/>
               <a:buChar char="•"/>
               <a:lnSpc>
                 <a:spcPts val="2200"/>
@@ -16203,10 +16411,12 @@
             </a:r>
           </a:p>
           <a:p>
-            <a:pPr>
-              <a:spcAft>
-                <a:spcPts val="1000"/>
-              </a:spcAft>
+            <a:pPr lvl="0" marL="457200" indent="-228600">
+              <a:buFont typeface="Calibri"/>
+              <a:spcAft>
+                <a:spcPts val="1000"/>
+              </a:spcAft>
+              <a:buSzPct val="100000"/>
               <a:buChar char="•"/>
               <a:lnSpc>
                 <a:spcPts val="2200"/>
@@ -16223,10 +16433,12 @@
             </a:r>
           </a:p>
           <a:p>
-            <a:pPr>
-              <a:spcAft>
-                <a:spcPts val="1000"/>
-              </a:spcAft>
+            <a:pPr lvl="0" marL="457200" indent="-228600">
+              <a:buFont typeface="Calibri"/>
+              <a:spcAft>
+                <a:spcPts val="1000"/>
+              </a:spcAft>
+              <a:buSzPct val="100000"/>
               <a:buChar char="•"/>
               <a:lnSpc>
                 <a:spcPts val="2200"/>
@@ -16362,10 +16574,12 @@
           </a:bodyPr>
           <a:lstStyle/>
           <a:p>
-            <a:pPr>
-              <a:spcAft>
-                <a:spcPts val="1000"/>
-              </a:spcAft>
+            <a:pPr lvl="0" marL="457200" indent="-228600">
+              <a:buFont typeface="Calibri"/>
+              <a:spcAft>
+                <a:spcPts val="1000"/>
+              </a:spcAft>
+              <a:buSzPct val="100000"/>
               <a:buChar char="•"/>
               <a:lnSpc>
                 <a:spcPts val="2200"/>
@@ -16382,10 +16596,12 @@
             </a:r>
           </a:p>
           <a:p>
-            <a:pPr>
-              <a:spcAft>
-                <a:spcPts val="1000"/>
-              </a:spcAft>
+            <a:pPr lvl="0" marL="457200" indent="-228600">
+              <a:buFont typeface="Calibri"/>
+              <a:spcAft>
+                <a:spcPts val="1000"/>
+              </a:spcAft>
+              <a:buSzPct val="100000"/>
               <a:buChar char="•"/>
               <a:lnSpc>
                 <a:spcPts val="2200"/>
@@ -16402,10 +16618,12 @@
             </a:r>
           </a:p>
           <a:p>
-            <a:pPr>
-              <a:spcAft>
-                <a:spcPts val="1000"/>
-              </a:spcAft>
+            <a:pPr lvl="0" marL="457200" indent="-228600">
+              <a:buFont typeface="Calibri"/>
+              <a:spcAft>
+                <a:spcPts val="1000"/>
+              </a:spcAft>
+              <a:buSzPct val="100000"/>
               <a:buChar char="•"/>
               <a:lnSpc>
                 <a:spcPts val="2200"/>
@@ -16422,10 +16640,12 @@
             </a:r>
           </a:p>
           <a:p>
-            <a:pPr>
-              <a:spcAft>
-                <a:spcPts val="1000"/>
-              </a:spcAft>
+            <a:pPr lvl="0" marL="457200" indent="-228600">
+              <a:buFont typeface="Calibri"/>
+              <a:spcAft>
+                <a:spcPts val="1000"/>
+              </a:spcAft>
+              <a:buSzPct val="100000"/>
               <a:buChar char="•"/>
               <a:lnSpc>
                 <a:spcPts val="2200"/>
@@ -16442,10 +16662,12 @@
             </a:r>
           </a:p>
           <a:p>
-            <a:pPr>
-              <a:spcAft>
-                <a:spcPts val="1000"/>
-              </a:spcAft>
+            <a:pPr lvl="0" marL="457200" indent="-228600">
+              <a:buFont typeface="Calibri"/>
+              <a:spcAft>
+                <a:spcPts val="1000"/>
+              </a:spcAft>
+              <a:buSzPct val="100000"/>
               <a:buChar char="•"/>
               <a:lnSpc>
                 <a:spcPts val="2200"/>
@@ -16581,10 +16803,12 @@
           </a:bodyPr>
           <a:lstStyle/>
           <a:p>
-            <a:pPr>
-              <a:spcAft>
-                <a:spcPts val="1000"/>
-              </a:spcAft>
+            <a:pPr lvl="0" marL="457200" indent="-228600">
+              <a:buFont typeface="Calibri"/>
+              <a:spcAft>
+                <a:spcPts val="1000"/>
+              </a:spcAft>
+              <a:buSzPct val="100000"/>
               <a:buChar char="•"/>
               <a:lnSpc>
                 <a:spcPts val="2200"/>
@@ -16601,10 +16825,12 @@
             </a:r>
           </a:p>
           <a:p>
-            <a:pPr>
-              <a:spcAft>
-                <a:spcPts val="1000"/>
-              </a:spcAft>
+            <a:pPr lvl="0" marL="457200" indent="-228600">
+              <a:buFont typeface="Calibri"/>
+              <a:spcAft>
+                <a:spcPts val="1000"/>
+              </a:spcAft>
+              <a:buSzPct val="100000"/>
               <a:buChar char="•"/>
               <a:lnSpc>
                 <a:spcPts val="2200"/>
@@ -16621,10 +16847,12 @@
             </a:r>
           </a:p>
           <a:p>
-            <a:pPr>
-              <a:spcAft>
-                <a:spcPts val="1000"/>
-              </a:spcAft>
+            <a:pPr lvl="0" marL="457200" indent="-228600">
+              <a:buFont typeface="Calibri"/>
+              <a:spcAft>
+                <a:spcPts val="1000"/>
+              </a:spcAft>
+              <a:buSzPct val="100000"/>
               <a:buChar char="•"/>
               <a:lnSpc>
                 <a:spcPts val="2200"/>
@@ -16760,10 +16988,12 @@
           </a:bodyPr>
           <a:lstStyle/>
           <a:p>
-            <a:pPr>
-              <a:spcAft>
-                <a:spcPts val="1000"/>
-              </a:spcAft>
+            <a:pPr lvl="0" marL="457200" indent="-228600">
+              <a:buFont typeface="Calibri"/>
+              <a:spcAft>
+                <a:spcPts val="1000"/>
+              </a:spcAft>
+              <a:buSzPct val="100000"/>
               <a:buChar char="•"/>
               <a:lnSpc>
                 <a:spcPts val="2200"/>
@@ -16780,10 +17010,12 @@
             </a:r>
           </a:p>
           <a:p>
-            <a:pPr>
-              <a:spcAft>
-                <a:spcPts val="1000"/>
-              </a:spcAft>
+            <a:pPr lvl="0" marL="457200" indent="-228600">
+              <a:buFont typeface="Calibri"/>
+              <a:spcAft>
+                <a:spcPts val="1000"/>
+              </a:spcAft>
+              <a:buSzPct val="100000"/>
               <a:buChar char="•"/>
               <a:lnSpc>
                 <a:spcPts val="2200"/>
@@ -16800,10 +17032,12 @@
             </a:r>
           </a:p>
           <a:p>
-            <a:pPr>
-              <a:spcAft>
-                <a:spcPts val="1000"/>
-              </a:spcAft>
+            <a:pPr lvl="0" marL="457200" indent="-228600">
+              <a:buFont typeface="Calibri"/>
+              <a:spcAft>
+                <a:spcPts val="1000"/>
+              </a:spcAft>
+              <a:buSzPct val="100000"/>
               <a:buChar char="•"/>
               <a:lnSpc>
                 <a:spcPts val="2200"/>
@@ -16820,10 +17054,12 @@
             </a:r>
           </a:p>
           <a:p>
-            <a:pPr>
-              <a:spcAft>
-                <a:spcPts val="1000"/>
-              </a:spcAft>
+            <a:pPr lvl="0" marL="457200" indent="-228600">
+              <a:buFont typeface="Calibri"/>
+              <a:spcAft>
+                <a:spcPts val="1000"/>
+              </a:spcAft>
+              <a:buSzPct val="100000"/>
               <a:buChar char="•"/>
               <a:lnSpc>
                 <a:spcPts val="2200"/>
@@ -16840,10 +17076,12 @@
             </a:r>
           </a:p>
           <a:p>
-            <a:pPr>
-              <a:spcAft>
-                <a:spcPts val="1000"/>
-              </a:spcAft>
+            <a:pPr lvl="0" marL="457200" indent="-228600">
+              <a:buFont typeface="Calibri"/>
+              <a:spcAft>
+                <a:spcPts val="1000"/>
+              </a:spcAft>
+              <a:buSzPct val="100000"/>
               <a:buChar char="•"/>
               <a:lnSpc>
                 <a:spcPts val="2200"/>
@@ -16979,10 +17217,12 @@
           </a:bodyPr>
           <a:lstStyle/>
           <a:p>
-            <a:pPr>
-              <a:spcAft>
-                <a:spcPts val="1000"/>
-              </a:spcAft>
+            <a:pPr lvl="0" marL="457200" indent="-228600">
+              <a:buFont typeface="Calibri"/>
+              <a:spcAft>
+                <a:spcPts val="1000"/>
+              </a:spcAft>
+              <a:buSzPct val="100000"/>
               <a:buChar char="•"/>
               <a:lnSpc>
                 <a:spcPts val="2200"/>
@@ -16999,10 +17239,12 @@
             </a:r>
           </a:p>
           <a:p>
-            <a:pPr>
-              <a:spcAft>
-                <a:spcPts val="1000"/>
-              </a:spcAft>
+            <a:pPr lvl="0" marL="457200" indent="-228600">
+              <a:buFont typeface="Calibri"/>
+              <a:spcAft>
+                <a:spcPts val="1000"/>
+              </a:spcAft>
+              <a:buSzPct val="100000"/>
               <a:buChar char="•"/>
               <a:lnSpc>
                 <a:spcPts val="2200"/>
@@ -17019,10 +17261,12 @@
             </a:r>
           </a:p>
           <a:p>
-            <a:pPr>
-              <a:spcAft>
-                <a:spcPts val="1000"/>
-              </a:spcAft>
+            <a:pPr lvl="0" marL="457200" indent="-228600">
+              <a:buFont typeface="Calibri"/>
+              <a:spcAft>
+                <a:spcPts val="1000"/>
+              </a:spcAft>
+              <a:buSzPct val="100000"/>
               <a:buChar char="•"/>
               <a:lnSpc>
                 <a:spcPts val="2200"/>
@@ -17158,10 +17402,12 @@
           </a:bodyPr>
           <a:lstStyle/>
           <a:p>
-            <a:pPr>
-              <a:spcAft>
-                <a:spcPts val="1000"/>
-              </a:spcAft>
+            <a:pPr lvl="0" marL="457200" indent="-228600">
+              <a:buFont typeface="Calibri"/>
+              <a:spcAft>
+                <a:spcPts val="1000"/>
+              </a:spcAft>
+              <a:buSzPct val="100000"/>
               <a:buChar char="•"/>
               <a:lnSpc>
                 <a:spcPts val="2200"/>
@@ -17178,10 +17424,12 @@
             </a:r>
           </a:p>
           <a:p>
-            <a:pPr>
-              <a:spcAft>
-                <a:spcPts val="1000"/>
-              </a:spcAft>
+            <a:pPr lvl="0" marL="457200" indent="-228600">
+              <a:buFont typeface="Calibri"/>
+              <a:spcAft>
+                <a:spcPts val="1000"/>
+              </a:spcAft>
+              <a:buSzPct val="100000"/>
               <a:buChar char="•"/>
               <a:lnSpc>
                 <a:spcPts val="2200"/>
@@ -17317,10 +17565,12 @@
           </a:bodyPr>
           <a:lstStyle/>
           <a:p>
-            <a:pPr>
-              <a:spcAft>
-                <a:spcPts val="1000"/>
-              </a:spcAft>
+            <a:pPr lvl="0" marL="457200" indent="-228600">
+              <a:buFont typeface="Calibri"/>
+              <a:spcAft>
+                <a:spcPts val="1000"/>
+              </a:spcAft>
+              <a:buSzPct val="100000"/>
               <a:buChar char="•"/>
               <a:lnSpc>
                 <a:spcPts val="2200"/>
@@ -17456,10 +17706,12 @@
           </a:bodyPr>
           <a:lstStyle/>
           <a:p>
-            <a:pPr>
-              <a:spcAft>
-                <a:spcPts val="1000"/>
-              </a:spcAft>
+            <a:pPr lvl="0" marL="457200" indent="-228600">
+              <a:buFont typeface="Calibri"/>
+              <a:spcAft>
+                <a:spcPts val="1000"/>
+              </a:spcAft>
+              <a:buSzPct val="100000"/>
               <a:buChar char="•"/>
               <a:lnSpc>
                 <a:spcPts val="2200"/>
@@ -17476,10 +17728,12 @@
             </a:r>
           </a:p>
           <a:p>
-            <a:pPr>
-              <a:spcAft>
-                <a:spcPts val="1000"/>
-              </a:spcAft>
+            <a:pPr lvl="0" marL="457200" indent="-228600">
+              <a:buFont typeface="Calibri"/>
+              <a:spcAft>
+                <a:spcPts val="1000"/>
+              </a:spcAft>
+              <a:buSzPct val="100000"/>
               <a:buChar char="•"/>
               <a:lnSpc>
                 <a:spcPts val="2200"/>
@@ -17615,10 +17869,12 @@
           </a:bodyPr>
           <a:lstStyle/>
           <a:p>
-            <a:pPr>
-              <a:spcAft>
-                <a:spcPts val="1000"/>
-              </a:spcAft>
+            <a:pPr lvl="0" marL="457200" indent="-228600">
+              <a:buFont typeface="Calibri"/>
+              <a:spcAft>
+                <a:spcPts val="1000"/>
+              </a:spcAft>
+              <a:buSzPct val="100000"/>
               <a:buChar char="•"/>
               <a:lnSpc>
                 <a:spcPts val="2200"/>
@@ -17635,10 +17891,12 @@
             </a:r>
           </a:p>
           <a:p>
-            <a:pPr>
-              <a:spcAft>
-                <a:spcPts val="1000"/>
-              </a:spcAft>
+            <a:pPr lvl="0" marL="457200" indent="-228600">
+              <a:buFont typeface="Calibri"/>
+              <a:spcAft>
+                <a:spcPts val="1000"/>
+              </a:spcAft>
+              <a:buSzPct val="100000"/>
               <a:buChar char="•"/>
               <a:lnSpc>
                 <a:spcPts val="2200"/>
@@ -17655,10 +17913,12 @@
             </a:r>
           </a:p>
           <a:p>
-            <a:pPr>
-              <a:spcAft>
-                <a:spcPts val="1000"/>
-              </a:spcAft>
+            <a:pPr lvl="0" marL="457200" indent="-228600">
+              <a:buFont typeface="Calibri"/>
+              <a:spcAft>
+                <a:spcPts val="1000"/>
+              </a:spcAft>
+              <a:buSzPct val="100000"/>
               <a:buChar char="•"/>
               <a:lnSpc>
                 <a:spcPts val="2200"/>
@@ -17675,10 +17935,12 @@
             </a:r>
           </a:p>
           <a:p>
-            <a:pPr>
-              <a:spcAft>
-                <a:spcPts val="1000"/>
-              </a:spcAft>
+            <a:pPr lvl="0" marL="457200" indent="-228600">
+              <a:buFont typeface="Calibri"/>
+              <a:spcAft>
+                <a:spcPts val="1000"/>
+              </a:spcAft>
+              <a:buSzPct val="100000"/>
               <a:buChar char="•"/>
               <a:lnSpc>
                 <a:spcPts val="2200"/>
@@ -17695,10 +17957,12 @@
             </a:r>
           </a:p>
           <a:p>
-            <a:pPr>
-              <a:spcAft>
-                <a:spcPts val="1000"/>
-              </a:spcAft>
+            <a:pPr lvl="0" marL="457200" indent="-228600">
+              <a:buFont typeface="Calibri"/>
+              <a:spcAft>
+                <a:spcPts val="1000"/>
+              </a:spcAft>
+              <a:buSzPct val="100000"/>
               <a:buChar char="•"/>
               <a:lnSpc>
                 <a:spcPts val="2200"/>
@@ -17834,10 +18098,12 @@
           </a:bodyPr>
           <a:lstStyle/>
           <a:p>
-            <a:pPr>
-              <a:spcAft>
-                <a:spcPts val="1000"/>
-              </a:spcAft>
+            <a:pPr lvl="0" marL="457200" indent="-228600">
+              <a:buFont typeface="Calibri"/>
+              <a:spcAft>
+                <a:spcPts val="1000"/>
+              </a:spcAft>
+              <a:buSzPct val="100000"/>
               <a:buChar char="•"/>
               <a:lnSpc>
                 <a:spcPts val="2200"/>
@@ -17854,10 +18120,12 @@
             </a:r>
           </a:p>
           <a:p>
-            <a:pPr>
-              <a:spcAft>
-                <a:spcPts val="1000"/>
-              </a:spcAft>
+            <a:pPr lvl="0" marL="457200" indent="-228600">
+              <a:buFont typeface="Calibri"/>
+              <a:spcAft>
+                <a:spcPts val="1000"/>
+              </a:spcAft>
+              <a:buSzPct val="100000"/>
               <a:buChar char="•"/>
               <a:lnSpc>
                 <a:spcPts val="2200"/>
@@ -17874,10 +18142,12 @@
             </a:r>
           </a:p>
           <a:p>
-            <a:pPr>
-              <a:spcAft>
-                <a:spcPts val="1000"/>
-              </a:spcAft>
+            <a:pPr lvl="0" marL="457200" indent="-228600">
+              <a:buFont typeface="Calibri"/>
+              <a:spcAft>
+                <a:spcPts val="1000"/>
+              </a:spcAft>
+              <a:buSzPct val="100000"/>
               <a:buChar char="•"/>
               <a:lnSpc>
                 <a:spcPts val="2200"/>
@@ -18013,10 +18283,12 @@
           </a:bodyPr>
           <a:lstStyle/>
           <a:p>
-            <a:pPr>
-              <a:spcAft>
-                <a:spcPts val="1000"/>
-              </a:spcAft>
+            <a:pPr lvl="0" marL="457200" indent="-228600">
+              <a:buFont typeface="Calibri"/>
+              <a:spcAft>
+                <a:spcPts val="1000"/>
+              </a:spcAft>
+              <a:buSzPct val="100000"/>
               <a:buChar char="•"/>
               <a:lnSpc>
                 <a:spcPts val="2200"/>
@@ -18033,10 +18305,12 @@
             </a:r>
           </a:p>
           <a:p>
-            <a:pPr>
-              <a:spcAft>
-                <a:spcPts val="1000"/>
-              </a:spcAft>
+            <a:pPr lvl="0" marL="457200" indent="-228600">
+              <a:buFont typeface="Calibri"/>
+              <a:spcAft>
+                <a:spcPts val="1000"/>
+              </a:spcAft>
+              <a:buSzPct val="100000"/>
               <a:buChar char="•"/>
               <a:lnSpc>
                 <a:spcPts val="2200"/>
@@ -18053,10 +18327,12 @@
             </a:r>
           </a:p>
           <a:p>
-            <a:pPr>
-              <a:spcAft>
-                <a:spcPts val="1000"/>
-              </a:spcAft>
+            <a:pPr lvl="0" marL="457200" indent="-228600">
+              <a:buFont typeface="Calibri"/>
+              <a:spcAft>
+                <a:spcPts val="1000"/>
+              </a:spcAft>
+              <a:buSzPct val="100000"/>
               <a:buChar char="•"/>
               <a:lnSpc>
                 <a:spcPts val="2200"/>
@@ -18192,10 +18468,12 @@
           </a:bodyPr>
           <a:lstStyle/>
           <a:p>
-            <a:pPr>
-              <a:spcAft>
-                <a:spcPts val="1000"/>
-              </a:spcAft>
+            <a:pPr lvl="0" marL="457200" indent="-228600">
+              <a:buFont typeface="Calibri"/>
+              <a:spcAft>
+                <a:spcPts val="1000"/>
+              </a:spcAft>
+              <a:buSzPct val="100000"/>
               <a:buChar char="•"/>
               <a:lnSpc>
                 <a:spcPts val="2200"/>
@@ -18212,10 +18490,12 @@
             </a:r>
           </a:p>
           <a:p>
-            <a:pPr>
-              <a:spcAft>
-                <a:spcPts val="1000"/>
-              </a:spcAft>
+            <a:pPr lvl="0" marL="457200" indent="-228600">
+              <a:buFont typeface="Calibri"/>
+              <a:spcAft>
+                <a:spcPts val="1000"/>
+              </a:spcAft>
+              <a:buSzPct val="100000"/>
               <a:buChar char="•"/>
               <a:lnSpc>
                 <a:spcPts val="2200"/>
@@ -18232,10 +18512,12 @@
             </a:r>
           </a:p>
           <a:p>
-            <a:pPr>
-              <a:spcAft>
-                <a:spcPts val="1000"/>
-              </a:spcAft>
+            <a:pPr lvl="0" marL="457200" indent="-228600">
+              <a:buFont typeface="Calibri"/>
+              <a:spcAft>
+                <a:spcPts val="1000"/>
+              </a:spcAft>
+              <a:buSzPct val="100000"/>
               <a:buChar char="•"/>
               <a:lnSpc>
                 <a:spcPts val="2200"/>
@@ -18252,10 +18534,12 @@
             </a:r>
           </a:p>
           <a:p>
-            <a:pPr>
-              <a:spcAft>
-                <a:spcPts val="1000"/>
-              </a:spcAft>
+            <a:pPr lvl="0" marL="457200" indent="-228600">
+              <a:buFont typeface="Calibri"/>
+              <a:spcAft>
+                <a:spcPts val="1000"/>
+              </a:spcAft>
+              <a:buSzPct val="100000"/>
               <a:buChar char="•"/>
               <a:lnSpc>
                 <a:spcPts val="2200"/>
@@ -18391,10 +18675,12 @@
           </a:bodyPr>
           <a:lstStyle/>
           <a:p>
-            <a:pPr>
-              <a:spcAft>
-                <a:spcPts val="1000"/>
-              </a:spcAft>
+            <a:pPr lvl="0" marL="457200" indent="-228600">
+              <a:buFont typeface="Calibri"/>
+              <a:spcAft>
+                <a:spcPts val="1000"/>
+              </a:spcAft>
+              <a:buSzPct val="100000"/>
               <a:buChar char="•"/>
               <a:lnSpc>
                 <a:spcPts val="2200"/>
@@ -18411,10 +18697,12 @@
             </a:r>
           </a:p>
           <a:p>
-            <a:pPr>
-              <a:spcAft>
-                <a:spcPts val="1000"/>
-              </a:spcAft>
+            <a:pPr lvl="0" marL="457200" indent="-228600">
+              <a:buFont typeface="Calibri"/>
+              <a:spcAft>
+                <a:spcPts val="1000"/>
+              </a:spcAft>
+              <a:buSzPct val="100000"/>
               <a:buChar char="•"/>
               <a:lnSpc>
                 <a:spcPts val="2200"/>
@@ -18431,10 +18719,12 @@
             </a:r>
           </a:p>
           <a:p>
-            <a:pPr>
-              <a:spcAft>
-                <a:spcPts val="1000"/>
-              </a:spcAft>
+            <a:pPr lvl="0" marL="457200" indent="-228600">
+              <a:buFont typeface="Calibri"/>
+              <a:spcAft>
+                <a:spcPts val="1000"/>
+              </a:spcAft>
+              <a:buSzPct val="100000"/>
               <a:buChar char="•"/>
               <a:lnSpc>
                 <a:spcPts val="2200"/>
@@ -18451,10 +18741,12 @@
             </a:r>
           </a:p>
           <a:p>
-            <a:pPr>
-              <a:spcAft>
-                <a:spcPts val="1000"/>
-              </a:spcAft>
+            <a:pPr lvl="0" marL="457200" indent="-228600">
+              <a:buFont typeface="Calibri"/>
+              <a:spcAft>
+                <a:spcPts val="1000"/>
+              </a:spcAft>
+              <a:buSzPct val="100000"/>
               <a:buChar char="•"/>
               <a:lnSpc>
                 <a:spcPts val="2200"/>
@@ -18471,10 +18763,12 @@
             </a:r>
           </a:p>
           <a:p>
-            <a:pPr>
-              <a:spcAft>
-                <a:spcPts val="1000"/>
-              </a:spcAft>
+            <a:pPr lvl="0" marL="457200" indent="-228600">
+              <a:buFont typeface="Calibri"/>
+              <a:spcAft>
+                <a:spcPts val="1000"/>
+              </a:spcAft>
+              <a:buSzPct val="100000"/>
               <a:buChar char="•"/>
               <a:lnSpc>
                 <a:spcPts val="2200"/>
@@ -18610,10 +18904,12 @@
           </a:bodyPr>
           <a:lstStyle/>
           <a:p>
-            <a:pPr>
-              <a:spcAft>
-                <a:spcPts val="1000"/>
-              </a:spcAft>
+            <a:pPr lvl="0" marL="457200" indent="-228600">
+              <a:buFont typeface="Calibri"/>
+              <a:spcAft>
+                <a:spcPts val="1000"/>
+              </a:spcAft>
+              <a:buSzPct val="100000"/>
               <a:buChar char="•"/>
               <a:lnSpc>
                 <a:spcPts val="2200"/>
@@ -18630,10 +18926,12 @@
             </a:r>
           </a:p>
           <a:p>
-            <a:pPr>
-              <a:spcAft>
-                <a:spcPts val="1000"/>
-              </a:spcAft>
+            <a:pPr lvl="0" marL="457200" indent="-228600">
+              <a:buFont typeface="Calibri"/>
+              <a:spcAft>
+                <a:spcPts val="1000"/>
+              </a:spcAft>
+              <a:buSzPct val="100000"/>
               <a:buChar char="•"/>
               <a:lnSpc>
                 <a:spcPts val="2200"/>
@@ -18650,10 +18948,12 @@
             </a:r>
           </a:p>
           <a:p>
-            <a:pPr>
-              <a:spcAft>
-                <a:spcPts val="1000"/>
-              </a:spcAft>
+            <a:pPr lvl="0" marL="457200" indent="-228600">
+              <a:buFont typeface="Calibri"/>
+              <a:spcAft>
+                <a:spcPts val="1000"/>
+              </a:spcAft>
+              <a:buSzPct val="100000"/>
               <a:buChar char="•"/>
               <a:lnSpc>
                 <a:spcPts val="2200"/>
@@ -18670,10 +18970,12 @@
             </a:r>
           </a:p>
           <a:p>
-            <a:pPr>
-              <a:spcAft>
-                <a:spcPts val="1000"/>
-              </a:spcAft>
+            <a:pPr lvl="0" marL="457200" indent="-228600">
+              <a:buFont typeface="Calibri"/>
+              <a:spcAft>
+                <a:spcPts val="1000"/>
+              </a:spcAft>
+              <a:buSzPct val="100000"/>
               <a:buChar char="•"/>
               <a:lnSpc>
                 <a:spcPts val="2200"/>
@@ -18690,10 +18992,12 @@
             </a:r>
           </a:p>
           <a:p>
-            <a:pPr>
-              <a:spcAft>
-                <a:spcPts val="1000"/>
-              </a:spcAft>
+            <a:pPr lvl="0" marL="457200" indent="-228600">
+              <a:buFont typeface="Calibri"/>
+              <a:spcAft>
+                <a:spcPts val="1000"/>
+              </a:spcAft>
+              <a:buSzPct val="100000"/>
               <a:buChar char="•"/>
               <a:lnSpc>
                 <a:spcPts val="2200"/>
@@ -18829,10 +19133,12 @@
           </a:bodyPr>
           <a:lstStyle/>
           <a:p>
-            <a:pPr>
-              <a:spcAft>
-                <a:spcPts val="1000"/>
-              </a:spcAft>
+            <a:pPr lvl="0" marL="457200" indent="-228600">
+              <a:buFont typeface="Calibri"/>
+              <a:spcAft>
+                <a:spcPts val="1000"/>
+              </a:spcAft>
+              <a:buSzPct val="100000"/>
               <a:buChar char="•"/>
               <a:lnSpc>
                 <a:spcPts val="2200"/>
@@ -18849,10 +19155,12 @@
             </a:r>
           </a:p>
           <a:p>
-            <a:pPr>
-              <a:spcAft>
-                <a:spcPts val="1000"/>
-              </a:spcAft>
+            <a:pPr lvl="0" marL="457200" indent="-228600">
+              <a:buFont typeface="Calibri"/>
+              <a:spcAft>
+                <a:spcPts val="1000"/>
+              </a:spcAft>
+              <a:buSzPct val="100000"/>
               <a:buChar char="•"/>
               <a:lnSpc>
                 <a:spcPts val="2200"/>
@@ -18869,10 +19177,12 @@
             </a:r>
           </a:p>
           <a:p>
-            <a:pPr>
-              <a:spcAft>
-                <a:spcPts val="1000"/>
-              </a:spcAft>
+            <a:pPr lvl="0" marL="457200" indent="-228600">
+              <a:buFont typeface="Calibri"/>
+              <a:spcAft>
+                <a:spcPts val="1000"/>
+              </a:spcAft>
+              <a:buSzPct val="100000"/>
               <a:buChar char="•"/>
               <a:lnSpc>
                 <a:spcPts val="2200"/>
@@ -19008,10 +19318,12 @@
           </a:bodyPr>
           <a:lstStyle/>
           <a:p>
-            <a:pPr>
-              <a:spcAft>
-                <a:spcPts val="1000"/>
-              </a:spcAft>
+            <a:pPr lvl="0" marL="457200" indent="-228600">
+              <a:buFont typeface="Calibri"/>
+              <a:spcAft>
+                <a:spcPts val="1000"/>
+              </a:spcAft>
+              <a:buSzPct val="100000"/>
               <a:buChar char="•"/>
               <a:lnSpc>
                 <a:spcPts val="2200"/>
@@ -19028,10 +19340,12 @@
             </a:r>
           </a:p>
           <a:p>
-            <a:pPr>
-              <a:spcAft>
-                <a:spcPts val="1000"/>
-              </a:spcAft>
+            <a:pPr lvl="0" marL="457200" indent="-228600">
+              <a:buFont typeface="Calibri"/>
+              <a:spcAft>
+                <a:spcPts val="1000"/>
+              </a:spcAft>
+              <a:buSzPct val="100000"/>
               <a:buChar char="•"/>
               <a:lnSpc>
                 <a:spcPts val="2200"/>
@@ -19167,10 +19481,12 @@
           </a:bodyPr>
           <a:lstStyle/>
           <a:p>
-            <a:pPr>
-              <a:spcAft>
-                <a:spcPts val="1000"/>
-              </a:spcAft>
+            <a:pPr lvl="0" marL="457200" indent="-228600">
+              <a:buFont typeface="Calibri"/>
+              <a:spcAft>
+                <a:spcPts val="1000"/>
+              </a:spcAft>
+              <a:buSzPct val="100000"/>
               <a:buChar char="•"/>
               <a:lnSpc>
                 <a:spcPts val="2200"/>
@@ -19306,10 +19622,12 @@
           </a:bodyPr>
           <a:lstStyle/>
           <a:p>
-            <a:pPr>
-              <a:spcAft>
-                <a:spcPts val="1000"/>
-              </a:spcAft>
+            <a:pPr lvl="0" marL="457200" indent="-228600">
+              <a:buFont typeface="Calibri"/>
+              <a:spcAft>
+                <a:spcPts val="1000"/>
+              </a:spcAft>
+              <a:buSzPct val="100000"/>
               <a:buChar char="•"/>
               <a:lnSpc>
                 <a:spcPts val="2200"/>
@@ -19326,10 +19644,12 @@
             </a:r>
           </a:p>
           <a:p>
-            <a:pPr>
-              <a:spcAft>
-                <a:spcPts val="1000"/>
-              </a:spcAft>
+            <a:pPr lvl="0" marL="457200" indent="-228600">
+              <a:buFont typeface="Calibri"/>
+              <a:spcAft>
+                <a:spcPts val="1000"/>
+              </a:spcAft>
+              <a:buSzPct val="100000"/>
               <a:buChar char="•"/>
               <a:lnSpc>
                 <a:spcPts val="2200"/>
@@ -19346,10 +19666,12 @@
             </a:r>
           </a:p>
           <a:p>
-            <a:pPr>
-              <a:spcAft>
-                <a:spcPts val="1000"/>
-              </a:spcAft>
+            <a:pPr lvl="0" marL="457200" indent="-228600">
+              <a:buFont typeface="Calibri"/>
+              <a:spcAft>
+                <a:spcPts val="1000"/>
+              </a:spcAft>
+              <a:buSzPct val="100000"/>
               <a:buChar char="•"/>
               <a:lnSpc>
                 <a:spcPts val="2200"/>
@@ -19485,10 +19807,12 @@
           </a:bodyPr>
           <a:lstStyle/>
           <a:p>
-            <a:pPr>
-              <a:spcAft>
-                <a:spcPts val="1000"/>
-              </a:spcAft>
+            <a:pPr lvl="0" marL="457200" indent="-228600">
+              <a:buFont typeface="Calibri"/>
+              <a:spcAft>
+                <a:spcPts val="1000"/>
+              </a:spcAft>
+              <a:buSzPct val="100000"/>
               <a:buChar char="•"/>
               <a:lnSpc>
                 <a:spcPts val="2200"/>
@@ -19505,10 +19829,12 @@
             </a:r>
           </a:p>
           <a:p>
-            <a:pPr>
-              <a:spcAft>
-                <a:spcPts val="1000"/>
-              </a:spcAft>
+            <a:pPr lvl="0" marL="457200" indent="-228600">
+              <a:buFont typeface="Calibri"/>
+              <a:spcAft>
+                <a:spcPts val="1000"/>
+              </a:spcAft>
+              <a:buSzPct val="100000"/>
               <a:buChar char="•"/>
               <a:lnSpc>
                 <a:spcPts val="2200"/>
@@ -19644,10 +19970,12 @@
           </a:bodyPr>
           <a:lstStyle/>
           <a:p>
-            <a:pPr>
-              <a:spcAft>
-                <a:spcPts val="1000"/>
-              </a:spcAft>
+            <a:pPr lvl="0" marL="457200" indent="-228600">
+              <a:buFont typeface="Calibri"/>
+              <a:spcAft>
+                <a:spcPts val="1000"/>
+              </a:spcAft>
+              <a:buSzPct val="100000"/>
               <a:buChar char="•"/>
               <a:lnSpc>
                 <a:spcPts val="2200"/>
@@ -19664,10 +19992,12 @@
             </a:r>
           </a:p>
           <a:p>
-            <a:pPr>
-              <a:spcAft>
-                <a:spcPts val="1000"/>
-              </a:spcAft>
+            <a:pPr lvl="0" marL="457200" indent="-228600">
+              <a:buFont typeface="Calibri"/>
+              <a:spcAft>
+                <a:spcPts val="1000"/>
+              </a:spcAft>
+              <a:buSzPct val="100000"/>
               <a:buChar char="•"/>
               <a:lnSpc>
                 <a:spcPts val="2200"/>
@@ -19684,10 +20014,12 @@
             </a:r>
           </a:p>
           <a:p>
-            <a:pPr>
-              <a:spcAft>
-                <a:spcPts val="1000"/>
-              </a:spcAft>
+            <a:pPr lvl="0" marL="457200" indent="-228600">
+              <a:buFont typeface="Calibri"/>
+              <a:spcAft>
+                <a:spcPts val="1000"/>
+              </a:spcAft>
+              <a:buSzPct val="100000"/>
               <a:buChar char="•"/>
               <a:lnSpc>
                 <a:spcPts val="2200"/>
@@ -19704,10 +20036,12 @@
             </a:r>
           </a:p>
           <a:p>
-            <a:pPr>
-              <a:spcAft>
-                <a:spcPts val="1000"/>
-              </a:spcAft>
+            <a:pPr lvl="0" marL="457200" indent="-228600">
+              <a:buFont typeface="Calibri"/>
+              <a:spcAft>
+                <a:spcPts val="1000"/>
+              </a:spcAft>
+              <a:buSzPct val="100000"/>
               <a:buChar char="•"/>
               <a:lnSpc>
                 <a:spcPts val="2200"/>
@@ -19724,10 +20058,12 @@
             </a:r>
           </a:p>
           <a:p>
-            <a:pPr>
-              <a:spcAft>
-                <a:spcPts val="1000"/>
-              </a:spcAft>
+            <a:pPr lvl="0" marL="457200" indent="-228600">
+              <a:buFont typeface="Calibri"/>
+              <a:spcAft>
+                <a:spcPts val="1000"/>
+              </a:spcAft>
+              <a:buSzPct val="100000"/>
               <a:buChar char="•"/>
               <a:lnSpc>
                 <a:spcPts val="2200"/>
@@ -19863,10 +20199,12 @@
           </a:bodyPr>
           <a:lstStyle/>
           <a:p>
-            <a:pPr>
-              <a:spcAft>
-                <a:spcPts val="1000"/>
-              </a:spcAft>
+            <a:pPr lvl="0" marL="457200" indent="-228600">
+              <a:buFont typeface="Calibri"/>
+              <a:spcAft>
+                <a:spcPts val="1000"/>
+              </a:spcAft>
+              <a:buSzPct val="100000"/>
               <a:buChar char="•"/>
               <a:lnSpc>
                 <a:spcPts val="2200"/>
@@ -19883,10 +20221,12 @@
             </a:r>
           </a:p>
           <a:p>
-            <a:pPr>
-              <a:spcAft>
-                <a:spcPts val="1000"/>
-              </a:spcAft>
+            <a:pPr lvl="0" marL="457200" indent="-228600">
+              <a:buFont typeface="Calibri"/>
+              <a:spcAft>
+                <a:spcPts val="1000"/>
+              </a:spcAft>
+              <a:buSzPct val="100000"/>
               <a:buChar char="•"/>
               <a:lnSpc>
                 <a:spcPts val="2200"/>
@@ -19903,10 +20243,12 @@
             </a:r>
           </a:p>
           <a:p>
-            <a:pPr>
-              <a:spcAft>
-                <a:spcPts val="1000"/>
-              </a:spcAft>
+            <a:pPr lvl="0" marL="457200" indent="-228600">
+              <a:buFont typeface="Calibri"/>
+              <a:spcAft>
+                <a:spcPts val="1000"/>
+              </a:spcAft>
+              <a:buSzPct val="100000"/>
               <a:buChar char="•"/>
               <a:lnSpc>
                 <a:spcPts val="2200"/>
@@ -19923,10 +20265,12 @@
             </a:r>
           </a:p>
           <a:p>
-            <a:pPr>
-              <a:spcAft>
-                <a:spcPts val="1000"/>
-              </a:spcAft>
+            <a:pPr lvl="0" marL="457200" indent="-228600">
+              <a:buFont typeface="Calibri"/>
+              <a:spcAft>
+                <a:spcPts val="1000"/>
+              </a:spcAft>
+              <a:buSzPct val="100000"/>
               <a:buChar char="•"/>
               <a:lnSpc>
                 <a:spcPts val="2200"/>
@@ -19943,10 +20287,12 @@
             </a:r>
           </a:p>
           <a:p>
-            <a:pPr>
-              <a:spcAft>
-                <a:spcPts val="1000"/>
-              </a:spcAft>
+            <a:pPr lvl="0" marL="457200" indent="-228600">
+              <a:buFont typeface="Calibri"/>
+              <a:spcAft>
+                <a:spcPts val="1000"/>
+              </a:spcAft>
+              <a:buSzPct val="100000"/>
               <a:buChar char="•"/>
               <a:lnSpc>
                 <a:spcPts val="2200"/>
@@ -19963,10 +20309,12 @@
             </a:r>
           </a:p>
           <a:p>
-            <a:pPr>
-              <a:spcAft>
-                <a:spcPts val="1000"/>
-              </a:spcAft>
+            <a:pPr lvl="0" marL="457200" indent="-228600">
+              <a:buFont typeface="Calibri"/>
+              <a:spcAft>
+                <a:spcPts val="1000"/>
+              </a:spcAft>
+              <a:buSzPct val="100000"/>
               <a:buChar char="•"/>
               <a:lnSpc>
                 <a:spcPts val="2200"/>
@@ -20102,10 +20450,12 @@
           </a:bodyPr>
           <a:lstStyle/>
           <a:p>
-            <a:pPr>
-              <a:spcAft>
-                <a:spcPts val="1000"/>
-              </a:spcAft>
+            <a:pPr lvl="0" marL="457200" indent="-228600">
+              <a:buFont typeface="Calibri"/>
+              <a:spcAft>
+                <a:spcPts val="1000"/>
+              </a:spcAft>
+              <a:buSzPct val="100000"/>
               <a:buChar char="•"/>
               <a:lnSpc>
                 <a:spcPts val="2200"/>
@@ -20122,10 +20472,12 @@
             </a:r>
           </a:p>
           <a:p>
-            <a:pPr>
-              <a:spcAft>
-                <a:spcPts val="1000"/>
-              </a:spcAft>
+            <a:pPr lvl="0" marL="457200" indent="-228600">
+              <a:buFont typeface="Calibri"/>
+              <a:spcAft>
+                <a:spcPts val="1000"/>
+              </a:spcAft>
+              <a:buSzPct val="100000"/>
               <a:buChar char="•"/>
               <a:lnSpc>
                 <a:spcPts val="2200"/>
@@ -20142,10 +20494,12 @@
             </a:r>
           </a:p>
           <a:p>
-            <a:pPr>
-              <a:spcAft>
-                <a:spcPts val="1000"/>
-              </a:spcAft>
+            <a:pPr lvl="0" marL="457200" indent="-228600">
+              <a:buFont typeface="Calibri"/>
+              <a:spcAft>
+                <a:spcPts val="1000"/>
+              </a:spcAft>
+              <a:buSzPct val="100000"/>
               <a:buChar char="•"/>
               <a:lnSpc>
                 <a:spcPts val="2200"/>
@@ -20162,10 +20516,12 @@
             </a:r>
           </a:p>
           <a:p>
-            <a:pPr>
-              <a:spcAft>
-                <a:spcPts val="1000"/>
-              </a:spcAft>
+            <a:pPr lvl="0" marL="457200" indent="-228600">
+              <a:buFont typeface="Calibri"/>
+              <a:spcAft>
+                <a:spcPts val="1000"/>
+              </a:spcAft>
+              <a:buSzPct val="100000"/>
               <a:buChar char="•"/>
               <a:lnSpc>
                 <a:spcPts val="2200"/>
@@ -20182,10 +20538,12 @@
             </a:r>
           </a:p>
           <a:p>
-            <a:pPr>
-              <a:spcAft>
-                <a:spcPts val="1000"/>
-              </a:spcAft>
+            <a:pPr lvl="0" marL="457200" indent="-228600">
+              <a:buFont typeface="Calibri"/>
+              <a:spcAft>
+                <a:spcPts val="1000"/>
+              </a:spcAft>
+              <a:buSzPct val="100000"/>
               <a:buChar char="•"/>
               <a:lnSpc>
                 <a:spcPts val="2200"/>
@@ -20321,10 +20679,12 @@
           </a:bodyPr>
           <a:lstStyle/>
           <a:p>
-            <a:pPr>
-              <a:spcAft>
-                <a:spcPts val="1000"/>
-              </a:spcAft>
+            <a:pPr lvl="0" marL="457200" indent="-228600">
+              <a:buFont typeface="Calibri"/>
+              <a:spcAft>
+                <a:spcPts val="1000"/>
+              </a:spcAft>
+              <a:buSzPct val="100000"/>
               <a:buChar char="•"/>
               <a:lnSpc>
                 <a:spcPts val="2200"/>
@@ -20341,10 +20701,12 @@
             </a:r>
           </a:p>
           <a:p>
-            <a:pPr>
-              <a:spcAft>
-                <a:spcPts val="1000"/>
-              </a:spcAft>
+            <a:pPr lvl="0" marL="457200" indent="-228600">
+              <a:buFont typeface="Calibri"/>
+              <a:spcAft>
+                <a:spcPts val="1000"/>
+              </a:spcAft>
+              <a:buSzPct val="100000"/>
               <a:buChar char="•"/>
               <a:lnSpc>
                 <a:spcPts val="2200"/>
@@ -20361,10 +20723,12 @@
             </a:r>
           </a:p>
           <a:p>
-            <a:pPr>
-              <a:spcAft>
-                <a:spcPts val="1000"/>
-              </a:spcAft>
+            <a:pPr lvl="0" marL="457200" indent="-228600">
+              <a:buFont typeface="Calibri"/>
+              <a:spcAft>
+                <a:spcPts val="1000"/>
+              </a:spcAft>
+              <a:buSzPct val="100000"/>
               <a:buChar char="•"/>
               <a:lnSpc>
                 <a:spcPts val="2200"/>
@@ -20500,10 +20864,12 @@
           </a:bodyPr>
           <a:lstStyle/>
           <a:p>
-            <a:pPr>
-              <a:spcAft>
-                <a:spcPts val="1000"/>
-              </a:spcAft>
+            <a:pPr lvl="0" marL="457200" indent="-228600">
+              <a:buFont typeface="Calibri"/>
+              <a:spcAft>
+                <a:spcPts val="1000"/>
+              </a:spcAft>
+              <a:buSzPct val="100000"/>
               <a:buChar char="•"/>
               <a:lnSpc>
                 <a:spcPts val="2200"/>
@@ -20520,10 +20886,12 @@
             </a:r>
           </a:p>
           <a:p>
-            <a:pPr>
-              <a:spcAft>
-                <a:spcPts val="1000"/>
-              </a:spcAft>
+            <a:pPr lvl="0" marL="457200" indent="-228600">
+              <a:buFont typeface="Calibri"/>
+              <a:spcAft>
+                <a:spcPts val="1000"/>
+              </a:spcAft>
+              <a:buSzPct val="100000"/>
               <a:buChar char="•"/>
               <a:lnSpc>
                 <a:spcPts val="2200"/>
@@ -20540,10 +20908,12 @@
             </a:r>
           </a:p>
           <a:p>
-            <a:pPr>
-              <a:spcAft>
-                <a:spcPts val="1000"/>
-              </a:spcAft>
+            <a:pPr lvl="0" marL="457200" indent="-228600">
+              <a:buFont typeface="Calibri"/>
+              <a:spcAft>
+                <a:spcPts val="1000"/>
+              </a:spcAft>
+              <a:buSzPct val="100000"/>
               <a:buChar char="•"/>
               <a:lnSpc>
                 <a:spcPts val="2200"/>
@@ -20679,10 +21049,12 @@
           </a:bodyPr>
           <a:lstStyle/>
           <a:p>
-            <a:pPr>
-              <a:spcAft>
-                <a:spcPts val="1000"/>
-              </a:spcAft>
+            <a:pPr lvl="0" marL="457200" indent="-228600">
+              <a:buFont typeface="Calibri"/>
+              <a:spcAft>
+                <a:spcPts val="1000"/>
+              </a:spcAft>
+              <a:buSzPct val="100000"/>
               <a:buChar char="•"/>
               <a:lnSpc>
                 <a:spcPts val="2200"/>
@@ -20699,10 +21071,12 @@
             </a:r>
           </a:p>
           <a:p>
-            <a:pPr>
-              <a:spcAft>
-                <a:spcPts val="1000"/>
-              </a:spcAft>
+            <a:pPr lvl="0" marL="457200" indent="-228600">
+              <a:buFont typeface="Calibri"/>
+              <a:spcAft>
+                <a:spcPts val="1000"/>
+              </a:spcAft>
+              <a:buSzPct val="100000"/>
               <a:buChar char="•"/>
               <a:lnSpc>
                 <a:spcPts val="2200"/>
@@ -20719,10 +21093,12 @@
             </a:r>
           </a:p>
           <a:p>
-            <a:pPr>
-              <a:spcAft>
-                <a:spcPts val="1000"/>
-              </a:spcAft>
+            <a:pPr lvl="0" marL="457200" indent="-228600">
+              <a:buFont typeface="Calibri"/>
+              <a:spcAft>
+                <a:spcPts val="1000"/>
+              </a:spcAft>
+              <a:buSzPct val="100000"/>
               <a:buChar char="•"/>
               <a:lnSpc>
                 <a:spcPts val="2200"/>
@@ -20858,10 +21234,12 @@
           </a:bodyPr>
           <a:lstStyle/>
           <a:p>
-            <a:pPr>
-              <a:spcAft>
-                <a:spcPts val="1000"/>
-              </a:spcAft>
+            <a:pPr lvl="0" marL="457200" indent="-228600">
+              <a:buFont typeface="Calibri"/>
+              <a:spcAft>
+                <a:spcPts val="1000"/>
+              </a:spcAft>
+              <a:buSzPct val="100000"/>
               <a:buChar char="•"/>
               <a:lnSpc>
                 <a:spcPts val="2200"/>
@@ -20878,10 +21256,12 @@
             </a:r>
           </a:p>
           <a:p>
-            <a:pPr>
-              <a:spcAft>
-                <a:spcPts val="1000"/>
-              </a:spcAft>
+            <a:pPr lvl="0" marL="457200" indent="-228600">
+              <a:buFont typeface="Calibri"/>
+              <a:spcAft>
+                <a:spcPts val="1000"/>
+              </a:spcAft>
+              <a:buSzPct val="100000"/>
               <a:buChar char="•"/>
               <a:lnSpc>
                 <a:spcPts val="2200"/>
@@ -21017,10 +21397,12 @@
           </a:bodyPr>
           <a:lstStyle/>
           <a:p>
-            <a:pPr>
-              <a:spcAft>
-                <a:spcPts val="1000"/>
-              </a:spcAft>
+            <a:pPr lvl="0" marL="457200" indent="-228600">
+              <a:buFont typeface="Calibri"/>
+              <a:spcAft>
+                <a:spcPts val="1000"/>
+              </a:spcAft>
+              <a:buSzPct val="100000"/>
               <a:buChar char="•"/>
               <a:lnSpc>
                 <a:spcPts val="2200"/>
@@ -21156,10 +21538,12 @@
           </a:bodyPr>
           <a:lstStyle/>
           <a:p>
-            <a:pPr>
-              <a:spcAft>
-                <a:spcPts val="1000"/>
-              </a:spcAft>
+            <a:pPr lvl="0" marL="457200" indent="-228600">
+              <a:buFont typeface="Calibri"/>
+              <a:spcAft>
+                <a:spcPts val="1000"/>
+              </a:spcAft>
+              <a:buSzPct val="100000"/>
               <a:buChar char="•"/>
               <a:lnSpc>
                 <a:spcPts val="2200"/>
@@ -21176,10 +21560,12 @@
             </a:r>
           </a:p>
           <a:p>
-            <a:pPr>
-              <a:spcAft>
-                <a:spcPts val="1000"/>
-              </a:spcAft>
+            <a:pPr lvl="0" marL="457200" indent="-228600">
+              <a:buFont typeface="Calibri"/>
+              <a:spcAft>
+                <a:spcPts val="1000"/>
+              </a:spcAft>
+              <a:buSzPct val="100000"/>
               <a:buChar char="•"/>
               <a:lnSpc>
                 <a:spcPts val="2200"/>
@@ -21315,10 +21701,12 @@
           </a:bodyPr>
           <a:lstStyle/>
           <a:p>
-            <a:pPr>
-              <a:spcAft>
-                <a:spcPts val="1000"/>
-              </a:spcAft>
+            <a:pPr lvl="0" marL="457200" indent="-228600">
+              <a:buFont typeface="Calibri"/>
+              <a:spcAft>
+                <a:spcPts val="1000"/>
+              </a:spcAft>
+              <a:buSzPct val="100000"/>
               <a:buChar char="•"/>
               <a:lnSpc>
                 <a:spcPts val="2200"/>
@@ -21335,10 +21723,12 @@
             </a:r>
           </a:p>
           <a:p>
-            <a:pPr>
-              <a:spcAft>
-                <a:spcPts val="1000"/>
-              </a:spcAft>
+            <a:pPr lvl="0" marL="457200" indent="-228600">
+              <a:buFont typeface="Calibri"/>
+              <a:spcAft>
+                <a:spcPts val="1000"/>
+              </a:spcAft>
+              <a:buSzPct val="100000"/>
               <a:buChar char="•"/>
               <a:lnSpc>
                 <a:spcPts val="2200"/>
@@ -21355,10 +21745,12 @@
             </a:r>
           </a:p>
           <a:p>
-            <a:pPr>
-              <a:spcAft>
-                <a:spcPts val="1000"/>
-              </a:spcAft>
+            <a:pPr lvl="0" marL="457200" indent="-228600">
+              <a:buFont typeface="Calibri"/>
+              <a:spcAft>
+                <a:spcPts val="1000"/>
+              </a:spcAft>
+              <a:buSzPct val="100000"/>
               <a:buChar char="•"/>
               <a:lnSpc>
                 <a:spcPts val="2200"/>
@@ -21375,10 +21767,12 @@
             </a:r>
           </a:p>
           <a:p>
-            <a:pPr>
-              <a:spcAft>
-                <a:spcPts val="1000"/>
-              </a:spcAft>
+            <a:pPr lvl="0" marL="457200" indent="-228600">
+              <a:buFont typeface="Calibri"/>
+              <a:spcAft>
+                <a:spcPts val="1000"/>
+              </a:spcAft>
+              <a:buSzPct val="100000"/>
               <a:buChar char="•"/>
               <a:lnSpc>
                 <a:spcPts val="2200"/>
@@ -21395,10 +21789,12 @@
             </a:r>
           </a:p>
           <a:p>
-            <a:pPr>
-              <a:spcAft>
-                <a:spcPts val="1000"/>
-              </a:spcAft>
+            <a:pPr lvl="0" marL="457200" indent="-228600">
+              <a:buFont typeface="Calibri"/>
+              <a:spcAft>
+                <a:spcPts val="1000"/>
+              </a:spcAft>
+              <a:buSzPct val="100000"/>
               <a:buChar char="•"/>
               <a:lnSpc>
                 <a:spcPts val="2200"/>
@@ -21534,10 +21930,12 @@
           </a:bodyPr>
           <a:lstStyle/>
           <a:p>
-            <a:pPr>
-              <a:spcAft>
-                <a:spcPts val="1000"/>
-              </a:spcAft>
+            <a:pPr lvl="0" marL="457200" indent="-228600">
+              <a:buFont typeface="Calibri"/>
+              <a:spcAft>
+                <a:spcPts val="1000"/>
+              </a:spcAft>
+              <a:buSzPct val="100000"/>
               <a:buChar char="•"/>
               <a:lnSpc>
                 <a:spcPts val="2200"/>
@@ -21554,10 +21952,12 @@
             </a:r>
           </a:p>
           <a:p>
-            <a:pPr>
-              <a:spcAft>
-                <a:spcPts val="1000"/>
-              </a:spcAft>
+            <a:pPr lvl="0" marL="457200" indent="-228600">
+              <a:buFont typeface="Calibri"/>
+              <a:spcAft>
+                <a:spcPts val="1000"/>
+              </a:spcAft>
+              <a:buSzPct val="100000"/>
               <a:buChar char="•"/>
               <a:lnSpc>
                 <a:spcPts val="2200"/>
@@ -21574,10 +21974,12 @@
             </a:r>
           </a:p>
           <a:p>
-            <a:pPr>
-              <a:spcAft>
-                <a:spcPts val="1000"/>
-              </a:spcAft>
+            <a:pPr lvl="0" marL="457200" indent="-228600">
+              <a:buFont typeface="Calibri"/>
+              <a:spcAft>
+                <a:spcPts val="1000"/>
+              </a:spcAft>
+              <a:buSzPct val="100000"/>
               <a:buChar char="•"/>
               <a:lnSpc>
                 <a:spcPts val="2200"/>
@@ -21594,10 +21996,12 @@
             </a:r>
           </a:p>
           <a:p>
-            <a:pPr>
-              <a:spcAft>
-                <a:spcPts val="1000"/>
-              </a:spcAft>
+            <a:pPr lvl="0" marL="457200" indent="-228600">
+              <a:buFont typeface="Calibri"/>
+              <a:spcAft>
+                <a:spcPts val="1000"/>
+              </a:spcAft>
+              <a:buSzPct val="100000"/>
               <a:buChar char="•"/>
               <a:lnSpc>
                 <a:spcPts val="2200"/>
@@ -21733,10 +22137,12 @@
           </a:bodyPr>
           <a:lstStyle/>
           <a:p>
-            <a:pPr>
-              <a:spcAft>
-                <a:spcPts val="1000"/>
-              </a:spcAft>
+            <a:pPr lvl="0" marL="457200" indent="-228600">
+              <a:buFont typeface="Calibri"/>
+              <a:spcAft>
+                <a:spcPts val="1000"/>
+              </a:spcAft>
+              <a:buSzPct val="100000"/>
               <a:buChar char="•"/>
               <a:lnSpc>
                 <a:spcPts val="2200"/>
@@ -21753,10 +22159,12 @@
             </a:r>
           </a:p>
           <a:p>
-            <a:pPr>
-              <a:spcAft>
-                <a:spcPts val="1000"/>
-              </a:spcAft>
+            <a:pPr lvl="0" marL="457200" indent="-228600">
+              <a:buFont typeface="Calibri"/>
+              <a:spcAft>
+                <a:spcPts val="1000"/>
+              </a:spcAft>
+              <a:buSzPct val="100000"/>
               <a:buChar char="•"/>
               <a:lnSpc>
                 <a:spcPts val="2200"/>
@@ -21773,10 +22181,12 @@
             </a:r>
           </a:p>
           <a:p>
-            <a:pPr>
-              <a:spcAft>
-                <a:spcPts val="1000"/>
-              </a:spcAft>
+            <a:pPr lvl="0" marL="457200" indent="-228600">
+              <a:buFont typeface="Calibri"/>
+              <a:spcAft>
+                <a:spcPts val="1000"/>
+              </a:spcAft>
+              <a:buSzPct val="100000"/>
               <a:buChar char="•"/>
               <a:lnSpc>
                 <a:spcPts val="2200"/>
@@ -21793,10 +22203,12 @@
             </a:r>
           </a:p>
           <a:p>
-            <a:pPr>
-              <a:spcAft>
-                <a:spcPts val="1000"/>
-              </a:spcAft>
+            <a:pPr lvl="0" marL="457200" indent="-228600">
+              <a:buFont typeface="Calibri"/>
+              <a:spcAft>
+                <a:spcPts val="1000"/>
+              </a:spcAft>
+              <a:buSzPct val="100000"/>
               <a:buChar char="•"/>
               <a:lnSpc>
                 <a:spcPts val="2200"/>
@@ -21813,10 +22225,12 @@
             </a:r>
           </a:p>
           <a:p>
-            <a:pPr>
-              <a:spcAft>
-                <a:spcPts val="1000"/>
-              </a:spcAft>
+            <a:pPr lvl="0" marL="457200" indent="-228600">
+              <a:buFont typeface="Calibri"/>
+              <a:spcAft>
+                <a:spcPts val="1000"/>
+              </a:spcAft>
+              <a:buSzPct val="100000"/>
               <a:buChar char="•"/>
               <a:lnSpc>
                 <a:spcPts val="2200"/>
@@ -21952,10 +22366,12 @@
           </a:bodyPr>
           <a:lstStyle/>
           <a:p>
-            <a:pPr>
-              <a:spcAft>
-                <a:spcPts val="1000"/>
-              </a:spcAft>
+            <a:pPr lvl="0" marL="457200" indent="-228600">
+              <a:buFont typeface="Calibri"/>
+              <a:spcAft>
+                <a:spcPts val="1000"/>
+              </a:spcAft>
+              <a:buSzPct val="100000"/>
               <a:buChar char="•"/>
               <a:lnSpc>
                 <a:spcPts val="2200"/>
@@ -21972,10 +22388,12 @@
             </a:r>
           </a:p>
           <a:p>
-            <a:pPr>
-              <a:spcAft>
-                <a:spcPts val="1000"/>
-              </a:spcAft>
+            <a:pPr lvl="0" marL="457200" indent="-228600">
+              <a:buFont typeface="Calibri"/>
+              <a:spcAft>
+                <a:spcPts val="1000"/>
+              </a:spcAft>
+              <a:buSzPct val="100000"/>
               <a:buChar char="•"/>
               <a:lnSpc>
                 <a:spcPts val="2200"/>
@@ -21992,10 +22410,12 @@
             </a:r>
           </a:p>
           <a:p>
-            <a:pPr>
-              <a:spcAft>
-                <a:spcPts val="1000"/>
-              </a:spcAft>
+            <a:pPr lvl="0" marL="457200" indent="-228600">
+              <a:buFont typeface="Calibri"/>
+              <a:spcAft>
+                <a:spcPts val="1000"/>
+              </a:spcAft>
+              <a:buSzPct val="100000"/>
               <a:buChar char="•"/>
               <a:lnSpc>
                 <a:spcPts val="2200"/>
@@ -22131,10 +22551,12 @@
           </a:bodyPr>
           <a:lstStyle/>
           <a:p>
-            <a:pPr>
-              <a:spcAft>
-                <a:spcPts val="1000"/>
-              </a:spcAft>
+            <a:pPr lvl="0" marL="457200" indent="-228600">
+              <a:buFont typeface="Calibri"/>
+              <a:spcAft>
+                <a:spcPts val="1000"/>
+              </a:spcAft>
+              <a:buSzPct val="100000"/>
               <a:buChar char="•"/>
               <a:lnSpc>
                 <a:spcPts val="2200"/>
@@ -22151,10 +22573,12 @@
             </a:r>
           </a:p>
           <a:p>
-            <a:pPr>
-              <a:spcAft>
-                <a:spcPts val="1000"/>
-              </a:spcAft>
+            <a:pPr lvl="0" marL="457200" indent="-228600">
+              <a:buFont typeface="Calibri"/>
+              <a:spcAft>
+                <a:spcPts val="1000"/>
+              </a:spcAft>
+              <a:buSzPct val="100000"/>
               <a:buChar char="•"/>
               <a:lnSpc>
                 <a:spcPts val="2200"/>
@@ -22171,10 +22595,12 @@
             </a:r>
           </a:p>
           <a:p>
-            <a:pPr>
-              <a:spcAft>
-                <a:spcPts val="1000"/>
-              </a:spcAft>
+            <a:pPr lvl="0" marL="457200" indent="-228600">
+              <a:buFont typeface="Calibri"/>
+              <a:spcAft>
+                <a:spcPts val="1000"/>
+              </a:spcAft>
+              <a:buSzPct val="100000"/>
               <a:buChar char="•"/>
               <a:lnSpc>
                 <a:spcPts val="2200"/>
@@ -22310,10 +22736,12 @@
           </a:bodyPr>
           <a:lstStyle/>
           <a:p>
-            <a:pPr>
-              <a:spcAft>
-                <a:spcPts val="1000"/>
-              </a:spcAft>
+            <a:pPr lvl="0" marL="457200" indent="-228600">
+              <a:buFont typeface="Calibri"/>
+              <a:spcAft>
+                <a:spcPts val="1000"/>
+              </a:spcAft>
+              <a:buSzPct val="100000"/>
               <a:buChar char="•"/>
               <a:lnSpc>
                 <a:spcPts val="2200"/>
@@ -22330,10 +22758,12 @@
             </a:r>
           </a:p>
           <a:p>
-            <a:pPr>
-              <a:spcAft>
-                <a:spcPts val="1000"/>
-              </a:spcAft>
+            <a:pPr lvl="0" marL="457200" indent="-228600">
+              <a:buFont typeface="Calibri"/>
+              <a:spcAft>
+                <a:spcPts val="1000"/>
+              </a:spcAft>
+              <a:buSzPct val="100000"/>
               <a:buChar char="•"/>
               <a:lnSpc>
                 <a:spcPts val="2200"/>
@@ -22350,10 +22780,12 @@
             </a:r>
           </a:p>
           <a:p>
-            <a:pPr>
-              <a:spcAft>
-                <a:spcPts val="1000"/>
-              </a:spcAft>
+            <a:pPr lvl="0" marL="457200" indent="-228600">
+              <a:buFont typeface="Calibri"/>
+              <a:spcAft>
+                <a:spcPts val="1000"/>
+              </a:spcAft>
+              <a:buSzPct val="100000"/>
               <a:buChar char="•"/>
               <a:lnSpc>
                 <a:spcPts val="2200"/>
@@ -22370,10 +22802,12 @@
             </a:r>
           </a:p>
           <a:p>
-            <a:pPr>
-              <a:spcAft>
-                <a:spcPts val="1000"/>
-              </a:spcAft>
+            <a:pPr lvl="0" marL="457200" indent="-228600">
+              <a:buFont typeface="Calibri"/>
+              <a:spcAft>
+                <a:spcPts val="1000"/>
+              </a:spcAft>
+              <a:buSzPct val="100000"/>
               <a:buChar char="•"/>
               <a:lnSpc>
                 <a:spcPts val="2200"/>
@@ -22390,10 +22824,12 @@
             </a:r>
           </a:p>
           <a:p>
-            <a:pPr>
-              <a:spcAft>
-                <a:spcPts val="1000"/>
-              </a:spcAft>
+            <a:pPr lvl="0" marL="457200" indent="-228600">
+              <a:buFont typeface="Calibri"/>
+              <a:spcAft>
+                <a:spcPts val="1000"/>
+              </a:spcAft>
+              <a:buSzPct val="100000"/>
               <a:buChar char="•"/>
               <a:lnSpc>
                 <a:spcPts val="2200"/>
@@ -22529,10 +22965,12 @@
           </a:bodyPr>
           <a:lstStyle/>
           <a:p>
-            <a:pPr>
-              <a:spcAft>
-                <a:spcPts val="1000"/>
-              </a:spcAft>
+            <a:pPr lvl="0" marL="457200" indent="-228600">
+              <a:buFont typeface="Calibri"/>
+              <a:spcAft>
+                <a:spcPts val="1000"/>
+              </a:spcAft>
+              <a:buSzPct val="100000"/>
               <a:buChar char="•"/>
               <a:lnSpc>
                 <a:spcPts val="2200"/>
@@ -22549,10 +22987,12 @@
             </a:r>
           </a:p>
           <a:p>
-            <a:pPr>
-              <a:spcAft>
-                <a:spcPts val="1000"/>
-              </a:spcAft>
+            <a:pPr lvl="0" marL="457200" indent="-228600">
+              <a:buFont typeface="Calibri"/>
+              <a:spcAft>
+                <a:spcPts val="1000"/>
+              </a:spcAft>
+              <a:buSzPct val="100000"/>
               <a:buChar char="•"/>
               <a:lnSpc>
                 <a:spcPts val="2200"/>
@@ -22569,10 +23009,12 @@
             </a:r>
           </a:p>
           <a:p>
-            <a:pPr>
-              <a:spcAft>
-                <a:spcPts val="1000"/>
-              </a:spcAft>
+            <a:pPr lvl="0" marL="457200" indent="-228600">
+              <a:buFont typeface="Calibri"/>
+              <a:spcAft>
+                <a:spcPts val="1000"/>
+              </a:spcAft>
+              <a:buSzPct val="100000"/>
               <a:buChar char="•"/>
               <a:lnSpc>
                 <a:spcPts val="2200"/>
@@ -22708,10 +23150,12 @@
           </a:bodyPr>
           <a:lstStyle/>
           <a:p>
-            <a:pPr>
-              <a:spcAft>
-                <a:spcPts val="1000"/>
-              </a:spcAft>
+            <a:pPr lvl="0" marL="457200" indent="-228600">
+              <a:buFont typeface="Calibri"/>
+              <a:spcAft>
+                <a:spcPts val="1000"/>
+              </a:spcAft>
+              <a:buSzPct val="100000"/>
               <a:buChar char="•"/>
               <a:lnSpc>
                 <a:spcPts val="2200"/>
@@ -22728,10 +23172,12 @@
             </a:r>
           </a:p>
           <a:p>
-            <a:pPr>
-              <a:spcAft>
-                <a:spcPts val="1000"/>
-              </a:spcAft>
+            <a:pPr lvl="0" marL="457200" indent="-228600">
+              <a:buFont typeface="Calibri"/>
+              <a:spcAft>
+                <a:spcPts val="1000"/>
+              </a:spcAft>
+              <a:buSzPct val="100000"/>
               <a:buChar char="•"/>
               <a:lnSpc>
                 <a:spcPts val="2200"/>
@@ -22867,10 +23313,12 @@
           </a:bodyPr>
           <a:lstStyle/>
           <a:p>
-            <a:pPr>
-              <a:spcAft>
-                <a:spcPts val="1000"/>
-              </a:spcAft>
+            <a:pPr lvl="0" marL="457200" indent="-228600">
+              <a:buFont typeface="Calibri"/>
+              <a:spcAft>
+                <a:spcPts val="1000"/>
+              </a:spcAft>
+              <a:buSzPct val="100000"/>
               <a:buChar char="•"/>
               <a:lnSpc>
                 <a:spcPts val="2200"/>
@@ -23006,10 +23454,12 @@
           </a:bodyPr>
           <a:lstStyle/>
           <a:p>
-            <a:pPr>
-              <a:spcAft>
-                <a:spcPts val="1000"/>
-              </a:spcAft>
+            <a:pPr lvl="0" marL="457200" indent="-228600">
+              <a:buFont typeface="Calibri"/>
+              <a:spcAft>
+                <a:spcPts val="1000"/>
+              </a:spcAft>
+              <a:buSzPct val="100000"/>
               <a:buChar char="•"/>
               <a:lnSpc>
                 <a:spcPts val="2200"/>
@@ -23026,10 +23476,12 @@
             </a:r>
           </a:p>
           <a:p>
-            <a:pPr>
-              <a:spcAft>
-                <a:spcPts val="1000"/>
-              </a:spcAft>
+            <a:pPr lvl="0" marL="457200" indent="-228600">
+              <a:buFont typeface="Calibri"/>
+              <a:spcAft>
+                <a:spcPts val="1000"/>
+              </a:spcAft>
+              <a:buSzPct val="100000"/>
               <a:buChar char="•"/>
               <a:lnSpc>
                 <a:spcPts val="2200"/>
@@ -23046,10 +23498,12 @@
             </a:r>
           </a:p>
           <a:p>
-            <a:pPr>
-              <a:spcAft>
-                <a:spcPts val="1000"/>
-              </a:spcAft>
+            <a:pPr lvl="0" marL="457200" indent="-228600">
+              <a:buFont typeface="Calibri"/>
+              <a:spcAft>
+                <a:spcPts val="1000"/>
+              </a:spcAft>
+              <a:buSzPct val="100000"/>
               <a:buChar char="•"/>
               <a:lnSpc>
                 <a:spcPts val="2200"/>
@@ -23185,10 +23639,12 @@
           </a:bodyPr>
           <a:lstStyle/>
           <a:p>
-            <a:pPr>
-              <a:spcAft>
-                <a:spcPts val="1000"/>
-              </a:spcAft>
+            <a:pPr lvl="0" marL="457200" indent="-228600">
+              <a:buFont typeface="Calibri"/>
+              <a:spcAft>
+                <a:spcPts val="1000"/>
+              </a:spcAft>
+              <a:buSzPct val="100000"/>
               <a:buChar char="•"/>
               <a:lnSpc>
                 <a:spcPts val="2200"/>
@@ -23205,10 +23661,12 @@
             </a:r>
           </a:p>
           <a:p>
-            <a:pPr>
-              <a:spcAft>
-                <a:spcPts val="1000"/>
-              </a:spcAft>
+            <a:pPr lvl="0" marL="457200" indent="-228600">
+              <a:buFont typeface="Calibri"/>
+              <a:spcAft>
+                <a:spcPts val="1000"/>
+              </a:spcAft>
+              <a:buSzPct val="100000"/>
               <a:buChar char="•"/>
               <a:lnSpc>
                 <a:spcPts val="2200"/>
@@ -23225,10 +23683,12 @@
             </a:r>
           </a:p>
           <a:p>
-            <a:pPr>
-              <a:spcAft>
-                <a:spcPts val="1000"/>
-              </a:spcAft>
+            <a:pPr lvl="0" marL="457200" indent="-228600">
+              <a:buFont typeface="Calibri"/>
+              <a:spcAft>
+                <a:spcPts val="1000"/>
+              </a:spcAft>
+              <a:buSzPct val="100000"/>
               <a:buChar char="•"/>
               <a:lnSpc>
                 <a:spcPts val="2200"/>
@@ -23364,10 +23824,12 @@
           </a:bodyPr>
           <a:lstStyle/>
           <a:p>
-            <a:pPr>
-              <a:spcAft>
-                <a:spcPts val="1000"/>
-              </a:spcAft>
+            <a:pPr lvl="0" marL="457200" indent="-228600">
+              <a:buFont typeface="Calibri"/>
+              <a:spcAft>
+                <a:spcPts val="1000"/>
+              </a:spcAft>
+              <a:buSzPct val="100000"/>
               <a:buChar char="•"/>
               <a:lnSpc>
                 <a:spcPts val="2200"/>
@@ -23384,10 +23846,12 @@
             </a:r>
           </a:p>
           <a:p>
-            <a:pPr>
-              <a:spcAft>
-                <a:spcPts val="1000"/>
-              </a:spcAft>
+            <a:pPr lvl="0" marL="457200" indent="-228600">
+              <a:buFont typeface="Calibri"/>
+              <a:spcAft>
+                <a:spcPts val="1000"/>
+              </a:spcAft>
+              <a:buSzPct val="100000"/>
               <a:buChar char="•"/>
               <a:lnSpc>
                 <a:spcPts val="2200"/>
@@ -23404,10 +23868,12 @@
             </a:r>
           </a:p>
           <a:p>
-            <a:pPr>
-              <a:spcAft>
-                <a:spcPts val="1000"/>
-              </a:spcAft>
+            <a:pPr lvl="0" marL="457200" indent="-228600">
+              <a:buFont typeface="Calibri"/>
+              <a:spcAft>
+                <a:spcPts val="1000"/>
+              </a:spcAft>
+              <a:buSzPct val="100000"/>
               <a:buChar char="•"/>
               <a:lnSpc>
                 <a:spcPts val="2200"/>
@@ -23543,10 +24009,12 @@
           </a:bodyPr>
           <a:lstStyle/>
           <a:p>
-            <a:pPr>
-              <a:spcAft>
-                <a:spcPts val="1000"/>
-              </a:spcAft>
+            <a:pPr lvl="0" marL="457200" indent="-228600">
+              <a:buFont typeface="Calibri"/>
+              <a:spcAft>
+                <a:spcPts val="1000"/>
+              </a:spcAft>
+              <a:buSzPct val="100000"/>
               <a:buChar char="•"/>
               <a:lnSpc>
                 <a:spcPts val="2200"/>
@@ -23563,10 +24031,12 @@
             </a:r>
           </a:p>
           <a:p>
-            <a:pPr>
-              <a:spcAft>
-                <a:spcPts val="1000"/>
-              </a:spcAft>
+            <a:pPr lvl="0" marL="457200" indent="-228600">
+              <a:buFont typeface="Calibri"/>
+              <a:spcAft>
+                <a:spcPts val="1000"/>
+              </a:spcAft>
+              <a:buSzPct val="100000"/>
               <a:buChar char="•"/>
               <a:lnSpc>
                 <a:spcPts val="2200"/>
@@ -23583,10 +24053,12 @@
             </a:r>
           </a:p>
           <a:p>
-            <a:pPr>
-              <a:spcAft>
-                <a:spcPts val="1000"/>
-              </a:spcAft>
+            <a:pPr lvl="0" marL="457200" indent="-228600">
+              <a:buFont typeface="Calibri"/>
+              <a:spcAft>
+                <a:spcPts val="1000"/>
+              </a:spcAft>
+              <a:buSzPct val="100000"/>
               <a:buChar char="•"/>
               <a:lnSpc>
                 <a:spcPts val="2200"/>
@@ -23603,10 +24075,12 @@
             </a:r>
           </a:p>
           <a:p>
-            <a:pPr>
-              <a:spcAft>
-                <a:spcPts val="1000"/>
-              </a:spcAft>
+            <a:pPr lvl="0" marL="457200" indent="-228600">
+              <a:buFont typeface="Calibri"/>
+              <a:spcAft>
+                <a:spcPts val="1000"/>
+              </a:spcAft>
+              <a:buSzPct val="100000"/>
               <a:buChar char="•"/>
               <a:lnSpc>
                 <a:spcPts val="2200"/>
@@ -23623,10 +24097,12 @@
             </a:r>
           </a:p>
           <a:p>
-            <a:pPr>
-              <a:spcAft>
-                <a:spcPts val="1000"/>
-              </a:spcAft>
+            <a:pPr lvl="0" marL="457200" indent="-228600">
+              <a:buFont typeface="Calibri"/>
+              <a:spcAft>
+                <a:spcPts val="1000"/>
+              </a:spcAft>
+              <a:buSzPct val="100000"/>
               <a:buChar char="•"/>
               <a:lnSpc>
                 <a:spcPts val="2200"/>
@@ -23762,10 +24238,12 @@
           </a:bodyPr>
           <a:lstStyle/>
           <a:p>
-            <a:pPr>
-              <a:spcAft>
-                <a:spcPts val="1000"/>
-              </a:spcAft>
+            <a:pPr lvl="0" marL="457200" indent="-228600">
+              <a:buFont typeface="Calibri"/>
+              <a:spcAft>
+                <a:spcPts val="1000"/>
+              </a:spcAft>
+              <a:buSzPct val="100000"/>
               <a:buChar char="•"/>
               <a:lnSpc>
                 <a:spcPts val="2200"/>
@@ -23782,10 +24260,12 @@
             </a:r>
           </a:p>
           <a:p>
-            <a:pPr>
-              <a:spcAft>
-                <a:spcPts val="1000"/>
-              </a:spcAft>
+            <a:pPr lvl="0" marL="457200" indent="-228600">
+              <a:buFont typeface="Calibri"/>
+              <a:spcAft>
+                <a:spcPts val="1000"/>
+              </a:spcAft>
+              <a:buSzPct val="100000"/>
               <a:buChar char="•"/>
               <a:lnSpc>
                 <a:spcPts val="2200"/>
@@ -23802,10 +24282,12 @@
             </a:r>
           </a:p>
           <a:p>
-            <a:pPr>
-              <a:spcAft>
-                <a:spcPts val="1000"/>
-              </a:spcAft>
+            <a:pPr lvl="0" marL="457200" indent="-228600">
+              <a:buFont typeface="Calibri"/>
+              <a:spcAft>
+                <a:spcPts val="1000"/>
+              </a:spcAft>
+              <a:buSzPct val="100000"/>
               <a:buChar char="•"/>
               <a:lnSpc>
                 <a:spcPts val="2200"/>
@@ -23941,10 +24423,12 @@
           </a:bodyPr>
           <a:lstStyle/>
           <a:p>
-            <a:pPr>
-              <a:spcAft>
-                <a:spcPts val="1000"/>
-              </a:spcAft>
+            <a:pPr lvl="0" marL="457200" indent="-228600">
+              <a:buFont typeface="Calibri"/>
+              <a:spcAft>
+                <a:spcPts val="1000"/>
+              </a:spcAft>
+              <a:buSzPct val="100000"/>
               <a:buChar char="•"/>
               <a:lnSpc>
                 <a:spcPts val="2200"/>
@@ -23961,10 +24445,12 @@
             </a:r>
           </a:p>
           <a:p>
-            <a:pPr>
-              <a:spcAft>
-                <a:spcPts val="1000"/>
-              </a:spcAft>
+            <a:pPr lvl="0" marL="457200" indent="-228600">
+              <a:buFont typeface="Calibri"/>
+              <a:spcAft>
+                <a:spcPts val="1000"/>
+              </a:spcAft>
+              <a:buSzPct val="100000"/>
               <a:buChar char="•"/>
               <a:lnSpc>
                 <a:spcPts val="2200"/>
@@ -23981,10 +24467,12 @@
             </a:r>
           </a:p>
           <a:p>
-            <a:pPr>
-              <a:spcAft>
-                <a:spcPts val="1000"/>
-              </a:spcAft>
+            <a:pPr lvl="0" marL="457200" indent="-228600">
+              <a:buFont typeface="Calibri"/>
+              <a:spcAft>
+                <a:spcPts val="1000"/>
+              </a:spcAft>
+              <a:buSzPct val="100000"/>
               <a:buChar char="•"/>
               <a:lnSpc>
                 <a:spcPts val="2200"/>
@@ -24001,10 +24489,12 @@
             </a:r>
           </a:p>
           <a:p>
-            <a:pPr>
-              <a:spcAft>
-                <a:spcPts val="1000"/>
-              </a:spcAft>
+            <a:pPr lvl="0" marL="457200" indent="-228600">
+              <a:buFont typeface="Calibri"/>
+              <a:spcAft>
+                <a:spcPts val="1000"/>
+              </a:spcAft>
+              <a:buSzPct val="100000"/>
               <a:buChar char="•"/>
               <a:lnSpc>
                 <a:spcPts val="2200"/>
@@ -24021,10 +24511,12 @@
             </a:r>
           </a:p>
           <a:p>
-            <a:pPr>
-              <a:spcAft>
-                <a:spcPts val="1000"/>
-              </a:spcAft>
+            <a:pPr lvl="0" marL="457200" indent="-228600">
+              <a:buFont typeface="Calibri"/>
+              <a:spcAft>
+                <a:spcPts val="1000"/>
+              </a:spcAft>
+              <a:buSzPct val="100000"/>
               <a:buChar char="•"/>
               <a:lnSpc>
                 <a:spcPts val="2200"/>
@@ -24160,10 +24652,12 @@
           </a:bodyPr>
           <a:lstStyle/>
           <a:p>
-            <a:pPr>
-              <a:spcAft>
-                <a:spcPts val="1000"/>
-              </a:spcAft>
+            <a:pPr lvl="0" marL="457200" indent="-228600">
+              <a:buFont typeface="Calibri"/>
+              <a:spcAft>
+                <a:spcPts val="1000"/>
+              </a:spcAft>
+              <a:buSzPct val="100000"/>
               <a:buChar char="•"/>
               <a:lnSpc>
                 <a:spcPts val="2200"/>
@@ -24180,10 +24674,12 @@
             </a:r>
           </a:p>
           <a:p>
-            <a:pPr>
-              <a:spcAft>
-                <a:spcPts val="1000"/>
-              </a:spcAft>
+            <a:pPr lvl="0" marL="457200" indent="-228600">
+              <a:buFont typeface="Calibri"/>
+              <a:spcAft>
+                <a:spcPts val="1000"/>
+              </a:spcAft>
+              <a:buSzPct val="100000"/>
               <a:buChar char="•"/>
               <a:lnSpc>
                 <a:spcPts val="2200"/>
@@ -24200,10 +24696,12 @@
             </a:r>
           </a:p>
           <a:p>
-            <a:pPr>
-              <a:spcAft>
-                <a:spcPts val="1000"/>
-              </a:spcAft>
+            <a:pPr lvl="0" marL="457200" indent="-228600">
+              <a:buFont typeface="Calibri"/>
+              <a:spcAft>
+                <a:spcPts val="1000"/>
+              </a:spcAft>
+              <a:buSzPct val="100000"/>
               <a:buChar char="•"/>
               <a:lnSpc>
                 <a:spcPts val="2200"/>
@@ -24220,10 +24718,12 @@
             </a:r>
           </a:p>
           <a:p>
-            <a:pPr>
-              <a:spcAft>
-                <a:spcPts val="1000"/>
-              </a:spcAft>
+            <a:pPr lvl="0" marL="457200" indent="-228600">
+              <a:buFont typeface="Calibri"/>
+              <a:spcAft>
+                <a:spcPts val="1000"/>
+              </a:spcAft>
+              <a:buSzPct val="100000"/>
               <a:buChar char="•"/>
               <a:lnSpc>
                 <a:spcPts val="2200"/>
@@ -24240,10 +24740,12 @@
             </a:r>
           </a:p>
           <a:p>
-            <a:pPr>
-              <a:spcAft>
-                <a:spcPts val="1000"/>
-              </a:spcAft>
+            <a:pPr lvl="0" marL="457200" indent="-228600">
+              <a:buFont typeface="Calibri"/>
+              <a:spcAft>
+                <a:spcPts val="1000"/>
+              </a:spcAft>
+              <a:buSzPct val="100000"/>
               <a:buChar char="•"/>
               <a:lnSpc>
                 <a:spcPts val="2200"/>
@@ -24379,10 +24881,12 @@
           </a:bodyPr>
           <a:lstStyle/>
           <a:p>
-            <a:pPr>
-              <a:spcAft>
-                <a:spcPts val="1000"/>
-              </a:spcAft>
+            <a:pPr lvl="0" marL="457200" indent="-228600">
+              <a:buFont typeface="Calibri"/>
+              <a:spcAft>
+                <a:spcPts val="1000"/>
+              </a:spcAft>
+              <a:buSzPct val="100000"/>
               <a:buChar char="•"/>
               <a:lnSpc>
                 <a:spcPts val="2200"/>
@@ -24399,10 +24903,12 @@
             </a:r>
           </a:p>
           <a:p>
-            <a:pPr>
-              <a:spcAft>
-                <a:spcPts val="1000"/>
-              </a:spcAft>
+            <a:pPr lvl="0" marL="457200" indent="-228600">
+              <a:buFont typeface="Calibri"/>
+              <a:spcAft>
+                <a:spcPts val="1000"/>
+              </a:spcAft>
+              <a:buSzPct val="100000"/>
               <a:buChar char="•"/>
               <a:lnSpc>
                 <a:spcPts val="2200"/>
@@ -24419,10 +24925,12 @@
             </a:r>
           </a:p>
           <a:p>
-            <a:pPr>
-              <a:spcAft>
-                <a:spcPts val="1000"/>
-              </a:spcAft>
+            <a:pPr lvl="0" marL="457200" indent="-228600">
+              <a:buFont typeface="Calibri"/>
+              <a:spcAft>
+                <a:spcPts val="1000"/>
+              </a:spcAft>
+              <a:buSzPct val="100000"/>
               <a:buChar char="•"/>
               <a:lnSpc>
                 <a:spcPts val="2200"/>
@@ -24558,10 +25066,12 @@
           </a:bodyPr>
           <a:lstStyle/>
           <a:p>
-            <a:pPr>
-              <a:spcAft>
-                <a:spcPts val="1000"/>
-              </a:spcAft>
+            <a:pPr lvl="0" marL="457200" indent="-228600">
+              <a:buFont typeface="Calibri"/>
+              <a:spcAft>
+                <a:spcPts val="1000"/>
+              </a:spcAft>
+              <a:buSzPct val="100000"/>
               <a:buChar char="•"/>
               <a:lnSpc>
                 <a:spcPts val="2200"/>
@@ -24578,10 +25088,12 @@
             </a:r>
           </a:p>
           <a:p>
-            <a:pPr>
-              <a:spcAft>
-                <a:spcPts val="1000"/>
-              </a:spcAft>
+            <a:pPr lvl="0" marL="457200" indent="-228600">
+              <a:buFont typeface="Calibri"/>
+              <a:spcAft>
+                <a:spcPts val="1000"/>
+              </a:spcAft>
+              <a:buSzPct val="100000"/>
               <a:buChar char="•"/>
               <a:lnSpc>
                 <a:spcPts val="2200"/>
@@ -24717,10 +25229,12 @@
           </a:bodyPr>
           <a:lstStyle/>
           <a:p>
-            <a:pPr>
-              <a:spcAft>
-                <a:spcPts val="1000"/>
-              </a:spcAft>
+            <a:pPr lvl="0" marL="457200" indent="-228600">
+              <a:buFont typeface="Calibri"/>
+              <a:spcAft>
+                <a:spcPts val="1000"/>
+              </a:spcAft>
+              <a:buSzPct val="100000"/>
               <a:buChar char="•"/>
               <a:lnSpc>
                 <a:spcPts val="2200"/>
@@ -24856,10 +25370,12 @@
           </a:bodyPr>
           <a:lstStyle/>
           <a:p>
-            <a:pPr>
-              <a:spcAft>
-                <a:spcPts val="1000"/>
-              </a:spcAft>
+            <a:pPr lvl="0" marL="457200" indent="-228600">
+              <a:buFont typeface="Calibri"/>
+              <a:spcAft>
+                <a:spcPts val="1000"/>
+              </a:spcAft>
+              <a:buSzPct val="100000"/>
               <a:buChar char="•"/>
               <a:lnSpc>
                 <a:spcPts val="2200"/>
@@ -24876,10 +25392,12 @@
             </a:r>
           </a:p>
           <a:p>
-            <a:pPr>
-              <a:spcAft>
-                <a:spcPts val="1000"/>
-              </a:spcAft>
+            <a:pPr lvl="0" marL="457200" indent="-228600">
+              <a:buFont typeface="Calibri"/>
+              <a:spcAft>
+                <a:spcPts val="1000"/>
+              </a:spcAft>
+              <a:buSzPct val="100000"/>
               <a:buChar char="•"/>
               <a:lnSpc>
                 <a:spcPts val="2200"/>
@@ -25015,10 +25533,12 @@
           </a:bodyPr>
           <a:lstStyle/>
           <a:p>
-            <a:pPr>
-              <a:spcAft>
-                <a:spcPts val="1000"/>
-              </a:spcAft>
+            <a:pPr lvl="0" marL="457200" indent="-228600">
+              <a:buFont typeface="Calibri"/>
+              <a:spcAft>
+                <a:spcPts val="1000"/>
+              </a:spcAft>
+              <a:buSzPct val="100000"/>
               <a:buChar char="•"/>
               <a:lnSpc>
                 <a:spcPts val="2200"/>
@@ -25035,10 +25555,12 @@
             </a:r>
           </a:p>
           <a:p>
-            <a:pPr>
-              <a:spcAft>
-                <a:spcPts val="1000"/>
-              </a:spcAft>
+            <a:pPr lvl="0" marL="457200" indent="-228600">
+              <a:buFont typeface="Calibri"/>
+              <a:spcAft>
+                <a:spcPts val="1000"/>
+              </a:spcAft>
+              <a:buSzPct val="100000"/>
               <a:buChar char="•"/>
               <a:lnSpc>
                 <a:spcPts val="2200"/>
@@ -25055,10 +25577,12 @@
             </a:r>
           </a:p>
           <a:p>
-            <a:pPr>
-              <a:spcAft>
-                <a:spcPts val="1000"/>
-              </a:spcAft>
+            <a:pPr lvl="0" marL="457200" indent="-228600">
+              <a:buFont typeface="Calibri"/>
+              <a:spcAft>
+                <a:spcPts val="1000"/>
+              </a:spcAft>
+              <a:buSzPct val="100000"/>
               <a:buChar char="•"/>
               <a:lnSpc>
                 <a:spcPts val="2200"/>
@@ -25075,10 +25599,12 @@
             </a:r>
           </a:p>
           <a:p>
-            <a:pPr>
-              <a:spcAft>
-                <a:spcPts val="1000"/>
-              </a:spcAft>
+            <a:pPr lvl="0" marL="457200" indent="-228600">
+              <a:buFont typeface="Calibri"/>
+              <a:spcAft>
+                <a:spcPts val="1000"/>
+              </a:spcAft>
+              <a:buSzPct val="100000"/>
               <a:buChar char="•"/>
               <a:lnSpc>
                 <a:spcPts val="2200"/>
@@ -25095,10 +25621,12 @@
             </a:r>
           </a:p>
           <a:p>
-            <a:pPr>
-              <a:spcAft>
-                <a:spcPts val="1000"/>
-              </a:spcAft>
+            <a:pPr lvl="0" marL="457200" indent="-228600">
+              <a:buFont typeface="Calibri"/>
+              <a:spcAft>
+                <a:spcPts val="1000"/>
+              </a:spcAft>
+              <a:buSzPct val="100000"/>
               <a:buChar char="•"/>
               <a:lnSpc>
                 <a:spcPts val="2200"/>
@@ -25234,10 +25762,12 @@
           </a:bodyPr>
           <a:lstStyle/>
           <a:p>
-            <a:pPr>
-              <a:spcAft>
-                <a:spcPts val="1000"/>
-              </a:spcAft>
+            <a:pPr lvl="0" marL="457200" indent="-228600">
+              <a:buFont typeface="Calibri"/>
+              <a:spcAft>
+                <a:spcPts val="1000"/>
+              </a:spcAft>
+              <a:buSzPct val="100000"/>
               <a:buChar char="•"/>
               <a:lnSpc>
                 <a:spcPts val="2200"/>
@@ -25254,10 +25784,12 @@
             </a:r>
           </a:p>
           <a:p>
-            <a:pPr>
-              <a:spcAft>
-                <a:spcPts val="1000"/>
-              </a:spcAft>
+            <a:pPr lvl="0" marL="457200" indent="-228600">
+              <a:buFont typeface="Calibri"/>
+              <a:spcAft>
+                <a:spcPts val="1000"/>
+              </a:spcAft>
+              <a:buSzPct val="100000"/>
               <a:buChar char="•"/>
               <a:lnSpc>
                 <a:spcPts val="2200"/>
@@ -25274,10 +25806,12 @@
             </a:r>
           </a:p>
           <a:p>
-            <a:pPr>
-              <a:spcAft>
-                <a:spcPts val="1000"/>
-              </a:spcAft>
+            <a:pPr lvl="0" marL="457200" indent="-228600">
+              <a:buFont typeface="Calibri"/>
+              <a:spcAft>
+                <a:spcPts val="1000"/>
+              </a:spcAft>
+              <a:buSzPct val="100000"/>
               <a:buChar char="•"/>
               <a:lnSpc>
                 <a:spcPts val="2200"/>
@@ -25413,10 +25947,12 @@
           </a:bodyPr>
           <a:lstStyle/>
           <a:p>
-            <a:pPr>
-              <a:spcAft>
-                <a:spcPts val="1000"/>
-              </a:spcAft>
+            <a:pPr lvl="0" marL="457200" indent="-228600">
+              <a:buFont typeface="Calibri"/>
+              <a:spcAft>
+                <a:spcPts val="1000"/>
+              </a:spcAft>
+              <a:buSzPct val="100000"/>
               <a:buChar char="•"/>
               <a:lnSpc>
                 <a:spcPts val="2200"/>
@@ -25433,10 +25969,12 @@
             </a:r>
           </a:p>
           <a:p>
-            <a:pPr>
-              <a:spcAft>
-                <a:spcPts val="1000"/>
-              </a:spcAft>
+            <a:pPr lvl="0" marL="457200" indent="-228600">
+              <a:buFont typeface="Calibri"/>
+              <a:spcAft>
+                <a:spcPts val="1000"/>
+              </a:spcAft>
+              <a:buSzPct val="100000"/>
               <a:buChar char="•"/>
               <a:lnSpc>
                 <a:spcPts val="2200"/>
@@ -25453,10 +25991,12 @@
             </a:r>
           </a:p>
           <a:p>
-            <a:pPr>
-              <a:spcAft>
-                <a:spcPts val="1000"/>
-              </a:spcAft>
+            <a:pPr lvl="0" marL="457200" indent="-228600">
+              <a:buFont typeface="Calibri"/>
+              <a:spcAft>
+                <a:spcPts val="1000"/>
+              </a:spcAft>
+              <a:buSzPct val="100000"/>
               <a:buChar char="•"/>
               <a:lnSpc>
                 <a:spcPts val="2200"/>
@@ -25592,10 +26132,12 @@
           </a:bodyPr>
           <a:lstStyle/>
           <a:p>
-            <a:pPr>
-              <a:spcAft>
-                <a:spcPts val="1000"/>
-              </a:spcAft>
+            <a:pPr lvl="0" marL="457200" indent="-228600">
+              <a:buFont typeface="Calibri"/>
+              <a:spcAft>
+                <a:spcPts val="1000"/>
+              </a:spcAft>
+              <a:buSzPct val="100000"/>
               <a:buChar char="•"/>
               <a:lnSpc>
                 <a:spcPts val="2200"/>
@@ -25612,10 +26154,12 @@
             </a:r>
           </a:p>
           <a:p>
-            <a:pPr>
-              <a:spcAft>
-                <a:spcPts val="1000"/>
-              </a:spcAft>
+            <a:pPr lvl="0" marL="457200" indent="-228600">
+              <a:buFont typeface="Calibri"/>
+              <a:spcAft>
+                <a:spcPts val="1000"/>
+              </a:spcAft>
+              <a:buSzPct val="100000"/>
               <a:buChar char="•"/>
               <a:lnSpc>
                 <a:spcPts val="2200"/>
@@ -25632,10 +26176,12 @@
             </a:r>
           </a:p>
           <a:p>
-            <a:pPr>
-              <a:spcAft>
-                <a:spcPts val="1000"/>
-              </a:spcAft>
+            <a:pPr lvl="0" marL="457200" indent="-228600">
+              <a:buFont typeface="Calibri"/>
+              <a:spcAft>
+                <a:spcPts val="1000"/>
+              </a:spcAft>
+              <a:buSzPct val="100000"/>
               <a:buChar char="•"/>
               <a:lnSpc>
                 <a:spcPts val="2200"/>
@@ -25652,10 +26198,12 @@
             </a:r>
           </a:p>
           <a:p>
-            <a:pPr>
-              <a:spcAft>
-                <a:spcPts val="1000"/>
-              </a:spcAft>
+            <a:pPr lvl="0" marL="457200" indent="-228600">
+              <a:buFont typeface="Calibri"/>
+              <a:spcAft>
+                <a:spcPts val="1000"/>
+              </a:spcAft>
+              <a:buSzPct val="100000"/>
               <a:buChar char="•"/>
               <a:lnSpc>
                 <a:spcPts val="2200"/>
@@ -25791,10 +26339,12 @@
           </a:bodyPr>
           <a:lstStyle/>
           <a:p>
-            <a:pPr>
-              <a:spcAft>
-                <a:spcPts val="1000"/>
-              </a:spcAft>
+            <a:pPr lvl="0" marL="457200" indent="-228600">
+              <a:buFont typeface="Calibri"/>
+              <a:spcAft>
+                <a:spcPts val="1000"/>
+              </a:spcAft>
+              <a:buSzPct val="100000"/>
               <a:buChar char="•"/>
               <a:lnSpc>
                 <a:spcPts val="2200"/>
@@ -25811,10 +26361,12 @@
             </a:r>
           </a:p>
           <a:p>
-            <a:pPr>
-              <a:spcAft>
-                <a:spcPts val="1000"/>
-              </a:spcAft>
+            <a:pPr lvl="0" marL="457200" indent="-228600">
+              <a:buFont typeface="Calibri"/>
+              <a:spcAft>
+                <a:spcPts val="1000"/>
+              </a:spcAft>
+              <a:buSzPct val="100000"/>
               <a:buChar char="•"/>
               <a:lnSpc>
                 <a:spcPts val="2200"/>
@@ -25950,10 +26502,12 @@
           </a:bodyPr>
           <a:lstStyle/>
           <a:p>
-            <a:pPr>
-              <a:spcAft>
-                <a:spcPts val="1000"/>
-              </a:spcAft>
+            <a:pPr lvl="0" marL="457200" indent="-228600">
+              <a:buFont typeface="Calibri"/>
+              <a:spcAft>
+                <a:spcPts val="1000"/>
+              </a:spcAft>
+              <a:buSzPct val="100000"/>
               <a:buChar char="•"/>
               <a:lnSpc>
                 <a:spcPts val="2200"/>
@@ -25970,10 +26524,12 @@
             </a:r>
           </a:p>
           <a:p>
-            <a:pPr>
-              <a:spcAft>
-                <a:spcPts val="1000"/>
-              </a:spcAft>
+            <a:pPr lvl="0" marL="457200" indent="-228600">
+              <a:buFont typeface="Calibri"/>
+              <a:spcAft>
+                <a:spcPts val="1000"/>
+              </a:spcAft>
+              <a:buSzPct val="100000"/>
               <a:buChar char="•"/>
               <a:lnSpc>
                 <a:spcPts val="2200"/>
@@ -25990,10 +26546,12 @@
             </a:r>
           </a:p>
           <a:p>
-            <a:pPr>
-              <a:spcAft>
-                <a:spcPts val="1000"/>
-              </a:spcAft>
+            <a:pPr lvl="0" marL="457200" indent="-228600">
+              <a:buFont typeface="Calibri"/>
+              <a:spcAft>
+                <a:spcPts val="1000"/>
+              </a:spcAft>
+              <a:buSzPct val="100000"/>
               <a:buChar char="•"/>
               <a:lnSpc>
                 <a:spcPts val="2200"/>
@@ -26129,10 +26687,12 @@
           </a:bodyPr>
           <a:lstStyle/>
           <a:p>
-            <a:pPr>
-              <a:spcAft>
-                <a:spcPts val="1000"/>
-              </a:spcAft>
+            <a:pPr lvl="0" marL="457200" indent="-228600">
+              <a:buFont typeface="Calibri"/>
+              <a:spcAft>
+                <a:spcPts val="1000"/>
+              </a:spcAft>
+              <a:buSzPct val="100000"/>
               <a:buChar char="•"/>
               <a:lnSpc>
                 <a:spcPts val="2200"/>
@@ -26149,10 +26709,12 @@
             </a:r>
           </a:p>
           <a:p>
-            <a:pPr>
-              <a:spcAft>
-                <a:spcPts val="1000"/>
-              </a:spcAft>
+            <a:pPr lvl="0" marL="457200" indent="-228600">
+              <a:buFont typeface="Calibri"/>
+              <a:spcAft>
+                <a:spcPts val="1000"/>
+              </a:spcAft>
+              <a:buSzPct val="100000"/>
               <a:buChar char="•"/>
               <a:lnSpc>
                 <a:spcPts val="2200"/>
@@ -26169,10 +26731,12 @@
             </a:r>
           </a:p>
           <a:p>
-            <a:pPr>
-              <a:spcAft>
-                <a:spcPts val="1000"/>
-              </a:spcAft>
+            <a:pPr lvl="0" marL="457200" indent="-228600">
+              <a:buFont typeface="Calibri"/>
+              <a:spcAft>
+                <a:spcPts val="1000"/>
+              </a:spcAft>
+              <a:buSzPct val="100000"/>
               <a:buChar char="•"/>
               <a:lnSpc>
                 <a:spcPts val="2200"/>
@@ -26308,10 +26872,12 @@
           </a:bodyPr>
           <a:lstStyle/>
           <a:p>
-            <a:pPr>
-              <a:spcAft>
-                <a:spcPts val="1000"/>
-              </a:spcAft>
+            <a:pPr lvl="0" marL="457200" indent="-228600">
+              <a:buFont typeface="Calibri"/>
+              <a:spcAft>
+                <a:spcPts val="1000"/>
+              </a:spcAft>
+              <a:buSzPct val="100000"/>
               <a:buChar char="•"/>
               <a:lnSpc>
                 <a:spcPts val="2200"/>
@@ -26328,10 +26894,12 @@
             </a:r>
           </a:p>
           <a:p>
-            <a:pPr>
-              <a:spcAft>
-                <a:spcPts val="1000"/>
-              </a:spcAft>
+            <a:pPr lvl="0" marL="457200" indent="-228600">
+              <a:buFont typeface="Calibri"/>
+              <a:spcAft>
+                <a:spcPts val="1000"/>
+              </a:spcAft>
+              <a:buSzPct val="100000"/>
               <a:buChar char="•"/>
               <a:lnSpc>
                 <a:spcPts val="2200"/>
